--- a/cours/Module TIC/Série Officielle 01-10/Cours_TIC_01_Introduction_aux_TIC_EN.pptx
+++ b/cours/Module TIC/Série Officielle 01-10/Cours_TIC_01_Introduction_aux_TIC_EN.pptx
@@ -2856,7 +2856,7 @@
           <a:solidFill>
             <a:schemeClr val="tx1"/>
           </a:solidFill>
-          <a:latin typeface="+mj-lt"/>
+          <a:latin typeface="Poppins"/>
           <a:ea typeface="+mj-ea"/>
           <a:cs typeface="+mj-cs"/>
         </a:defRPr>
@@ -2873,7 +2873,7 @@
           <a:solidFill>
             <a:schemeClr val="tx1"/>
           </a:solidFill>
-          <a:latin typeface="+mn-lt"/>
+          <a:latin typeface="Poppins"/>
           <a:ea typeface="+mn-ea"/>
           <a:cs typeface="+mn-cs"/>
         </a:defRPr>
@@ -2888,7 +2888,7 @@
           <a:solidFill>
             <a:schemeClr val="tx1"/>
           </a:solidFill>
-          <a:latin typeface="+mn-lt"/>
+          <a:latin typeface="Poppins"/>
           <a:ea typeface="+mn-ea"/>
           <a:cs typeface="+mn-cs"/>
         </a:defRPr>
@@ -2903,7 +2903,7 @@
           <a:solidFill>
             <a:schemeClr val="tx1"/>
           </a:solidFill>
-          <a:latin typeface="+mn-lt"/>
+          <a:latin typeface="Poppins"/>
           <a:ea typeface="+mn-ea"/>
           <a:cs typeface="+mn-cs"/>
         </a:defRPr>
@@ -2918,7 +2918,7 @@
           <a:solidFill>
             <a:schemeClr val="tx1"/>
           </a:solidFill>
-          <a:latin typeface="+mn-lt"/>
+          <a:latin typeface="Poppins"/>
           <a:ea typeface="+mn-ea"/>
           <a:cs typeface="+mn-cs"/>
         </a:defRPr>
@@ -2933,7 +2933,7 @@
           <a:solidFill>
             <a:schemeClr val="tx1"/>
           </a:solidFill>
-          <a:latin typeface="+mn-lt"/>
+          <a:latin typeface="Poppins"/>
           <a:ea typeface="+mn-ea"/>
           <a:cs typeface="+mn-cs"/>
         </a:defRPr>
@@ -2948,7 +2948,7 @@
           <a:solidFill>
             <a:schemeClr val="tx1"/>
           </a:solidFill>
-          <a:latin typeface="+mn-lt"/>
+          <a:latin typeface="Poppins"/>
           <a:ea typeface="+mn-ea"/>
           <a:cs typeface="+mn-cs"/>
         </a:defRPr>
@@ -2963,7 +2963,7 @@
           <a:solidFill>
             <a:schemeClr val="tx1"/>
           </a:solidFill>
-          <a:latin typeface="+mn-lt"/>
+          <a:latin typeface="Poppins"/>
           <a:ea typeface="+mn-ea"/>
           <a:cs typeface="+mn-cs"/>
         </a:defRPr>
@@ -2978,7 +2978,7 @@
           <a:solidFill>
             <a:schemeClr val="tx1"/>
           </a:solidFill>
-          <a:latin typeface="+mn-lt"/>
+          <a:latin typeface="Poppins"/>
           <a:ea typeface="+mn-ea"/>
           <a:cs typeface="+mn-cs"/>
         </a:defRPr>
@@ -2993,7 +2993,7 @@
           <a:solidFill>
             <a:schemeClr val="tx1"/>
           </a:solidFill>
-          <a:latin typeface="+mn-lt"/>
+          <a:latin typeface="Poppins"/>
           <a:ea typeface="+mn-ea"/>
           <a:cs typeface="+mn-cs"/>
         </a:defRPr>
@@ -3008,7 +3008,7 @@
           <a:solidFill>
             <a:schemeClr val="tx1"/>
           </a:solidFill>
-          <a:latin typeface="+mn-lt"/>
+          <a:latin typeface="Poppins"/>
           <a:ea typeface="+mn-ea"/>
           <a:cs typeface="+mn-cs"/>
         </a:defRPr>
@@ -3018,7 +3018,7 @@
           <a:solidFill>
             <a:schemeClr val="tx1"/>
           </a:solidFill>
-          <a:latin typeface="+mn-lt"/>
+          <a:latin typeface="Poppins"/>
           <a:ea typeface="+mn-ea"/>
           <a:cs typeface="+mn-cs"/>
         </a:defRPr>
@@ -3028,7 +3028,7 @@
           <a:solidFill>
             <a:schemeClr val="tx1"/>
           </a:solidFill>
-          <a:latin typeface="+mn-lt"/>
+          <a:latin typeface="Poppins"/>
           <a:ea typeface="+mn-ea"/>
           <a:cs typeface="+mn-cs"/>
         </a:defRPr>
@@ -3038,7 +3038,7 @@
           <a:solidFill>
             <a:schemeClr val="tx1"/>
           </a:solidFill>
-          <a:latin typeface="+mn-lt"/>
+          <a:latin typeface="Poppins"/>
           <a:ea typeface="+mn-ea"/>
           <a:cs typeface="+mn-cs"/>
         </a:defRPr>
@@ -3048,7 +3048,7 @@
           <a:solidFill>
             <a:schemeClr val="tx1"/>
           </a:solidFill>
-          <a:latin typeface="+mn-lt"/>
+          <a:latin typeface="Poppins"/>
           <a:ea typeface="+mn-ea"/>
           <a:cs typeface="+mn-cs"/>
         </a:defRPr>
@@ -3058,7 +3058,7 @@
           <a:solidFill>
             <a:schemeClr val="tx1"/>
           </a:solidFill>
-          <a:latin typeface="+mn-lt"/>
+          <a:latin typeface="Poppins"/>
           <a:ea typeface="+mn-ea"/>
           <a:cs typeface="+mn-cs"/>
         </a:defRPr>
@@ -3068,7 +3068,7 @@
           <a:solidFill>
             <a:schemeClr val="tx1"/>
           </a:solidFill>
-          <a:latin typeface="+mn-lt"/>
+          <a:latin typeface="Poppins"/>
           <a:ea typeface="+mn-ea"/>
           <a:cs typeface="+mn-cs"/>
         </a:defRPr>
@@ -3078,7 +3078,7 @@
           <a:solidFill>
             <a:schemeClr val="tx1"/>
           </a:solidFill>
-          <a:latin typeface="+mn-lt"/>
+          <a:latin typeface="Poppins"/>
           <a:ea typeface="+mn-ea"/>
           <a:cs typeface="+mn-cs"/>
         </a:defRPr>
@@ -3088,7 +3088,7 @@
           <a:solidFill>
             <a:schemeClr val="tx1"/>
           </a:solidFill>
-          <a:latin typeface="+mn-lt"/>
+          <a:latin typeface="Poppins"/>
           <a:ea typeface="+mn-ea"/>
           <a:cs typeface="+mn-cs"/>
         </a:defRPr>
@@ -3103,9 +3103,7 @@
   <p:cSld>
     <p:bg>
       <p:bgPr>
-        <a:solidFill>
-          <a:srgbClr val="0B3D2E"/>
-        </a:solidFill>
+        <a:solidFill>val="004A38"/&gt;</a:solidFill>
         <a:effectLst/>
       </p:bgPr>
     </p:bg>
@@ -3130,9 +3128,7 @@
           <a:prstGeom prst="rect">
             <a:avLst/>
           </a:prstGeom>
-          <a:solidFill>
-            <a:srgbClr val="146B4A"/>
-          </a:solidFill>
+          <a:solidFill>val="007A55"/&gt;</a:solidFill>
           <a:ln>
             <a:noFill/>
           </a:ln>
@@ -3174,9 +3170,7 @@
           <a:prstGeom prst="rect">
             <a:avLst/>
           </a:prstGeom>
-          <a:solidFill>
-            <a:srgbClr val="FFD700"/>
-          </a:solidFill>
+          <a:solidFill>val="F0B429"/&gt;</a:solidFill>
           <a:ln>
             <a:noFill/>
           </a:ln>
@@ -3218,9 +3212,7 @@
           <a:prstGeom prst="rect">
             <a:avLst/>
           </a:prstGeom>
-          <a:solidFill>
-            <a:srgbClr val="FFD700"/>
-          </a:solidFill>
+          <a:solidFill>val="F0B429"/&gt;</a:solidFill>
           <a:ln>
             <a:noFill/>
           </a:ln>
@@ -3262,9 +3254,7 @@
           <a:prstGeom prst="rect">
             <a:avLst/>
           </a:prstGeom>
-          <a:solidFill>
-            <a:srgbClr val="146B4A"/>
-          </a:solidFill>
+          <a:solidFill>val="007A55"/&gt;</a:solidFill>
           <a:ln>
             <a:noFill/>
           </a:ln>
@@ -3306,9 +3296,7 @@
           <a:prstGeom prst="rect">
             <a:avLst/>
           </a:prstGeom>
-          <a:solidFill>
-            <a:srgbClr val="FFD700"/>
-          </a:solidFill>
+          <a:solidFill>val="F0B429"/&gt;</a:solidFill>
           <a:ln>
             <a:noFill/>
           </a:ln>
@@ -3361,10 +3349,8 @@
             <a:pPr algn="ctr"/>
             <a:r>
               <a:rPr sz="4000" b="1" i="0">
-                <a:solidFill>
-                  <a:srgbClr val="FFD700"/>
-                </a:solidFill>
-                <a:latin typeface="Calibri"/>
+                <a:solidFill>val="F0B429"/&gt;</a:solidFill>
+                <a:latin typeface="Poppins"/>
               </a:rPr>
               <a:t>TIC COURSE 01</a:t>
             </a:r>
@@ -3396,10 +3382,8 @@
             <a:pPr algn="ctr"/>
             <a:r>
               <a:rPr sz="3000" b="1" i="0">
-                <a:solidFill>
-                  <a:srgbClr val="FFFFFF"/>
-                </a:solidFill>
-                <a:latin typeface="Calibri"/>
+                <a:solidFill>val="FFFFFF"/&gt;</a:solidFill>
+                <a:latin typeface="Poppins"/>
               </a:rPr>
               <a:t>Introduction to Information and Communication Technology</a:t>
             </a:r>
@@ -3420,9 +3404,7 @@
           <a:prstGeom prst="rect">
             <a:avLst/>
           </a:prstGeom>
-          <a:solidFill>
-            <a:srgbClr val="146B4A"/>
-          </a:solidFill>
+          <a:solidFill>val="007A55"/&gt;</a:solidFill>
           <a:ln>
             <a:noFill/>
           </a:ln>
@@ -3475,10 +3457,8 @@
             <a:pPr algn="ctr"/>
             <a:r>
               <a:rPr sz="1800" b="0" i="0">
-                <a:solidFill>
-                  <a:srgbClr val="BBBBBB"/>
-                </a:solidFill>
-                <a:latin typeface="Calibri"/>
+                <a:solidFill>val="9AA7B6"/&gt;</a:solidFill>
+                <a:latin typeface="Poppins"/>
               </a:rPr>
               <a:t>Dr. BELACEL Madani</a:t>
             </a:r>
@@ -3510,10 +3490,8 @@
             <a:pPr algn="ctr"/>
             <a:r>
               <a:rPr sz="1400" b="0" i="1">
-                <a:solidFill>
-                  <a:srgbClr val="BBBBBB"/>
-                </a:solidFill>
-                <a:latin typeface="Calibri"/>
+                <a:solidFill>val="9AA7B6"/&gt;</a:solidFill>
+                <a:latin typeface="Poppins"/>
               </a:rPr>
               <a:t>Année universitaire 2026-2027 / Academic Year 2026-2027</a:t>
             </a:r>
@@ -3545,10 +3523,8 @@
             <a:pPr algn="ctr"/>
             <a:r>
               <a:rPr sz="1200" b="0" i="1">
-                <a:solidFill>
-                  <a:srgbClr val="BBBBBB"/>
-                </a:solidFill>
-                <a:latin typeface="Calibri"/>
+                <a:solidFill>val="9AA7B6"/&gt;</a:solidFill>
+                <a:latin typeface="Poppins"/>
               </a:rPr>
               <a:t>Université de Mostaganem - Département Mathématiques et Informatique</a:t>
             </a:r>
@@ -3579,6 +3555,47 @@
           </a:prstGeom>
         </p:spPr>
       </p:pic>
+      <p:sp>
+        <p:nvSpPr>
+          <p:cNvPr id="990001" name="Pied de page FLE"/>
+          <p:cNvSpPr>
+            <a:spLocks noGrp="1"/>
+          </p:cNvSpPr>
+          <p:nvPr/>
+        </p:nvSpPr>
+        <p:spPr>
+          <a:xfrm>
+            <a:off x="4343400" y="-329184"/>
+            <a:ext cx="4572000" cy="274320"/>
+          </a:xfrm>
+          <a:prstGeom prst="rect">
+            <a:avLst/>
+          </a:prstGeom>
+        </p:spPr>
+        <p:txBody>
+          <a:bodyPr anchor="b"/>
+          <a:lstStyle/>
+          <a:p>
+            <a:pPr algn="r">
+              <a:defRPr sz="900">
+                <a:solidFill>
+                  <a:srgbClr val="9AA7B6"/>
+                </a:solidFill>
+                <a:latin typeface="Poppins"/>
+              </a:defRPr>
+            </a:pPr>
+            <a:r>
+              <a:rPr lang="fr-FR" sz="900">
+                <a:solidFill>
+                  <a:srgbClr val="9AA7B6"/>
+                </a:solidFill>
+                <a:latin typeface="Poppins"/>
+              </a:rPr>
+              <a:t>Université de Mostaganem — Dr. Madani BELACEL</a:t>
+            </a:r>
+          </a:p>
+        </p:txBody>
+      </p:sp>
     </p:spTree>
   </p:cSld>
   <p:clrMapOvr>
@@ -3592,9 +3609,7 @@
   <p:cSld>
     <p:bg>
       <p:bgPr>
-        <a:solidFill>
-          <a:srgbClr val="0B3D2E"/>
-        </a:solidFill>
+        <a:solidFill>val="004A38"/&gt;</a:solidFill>
         <a:effectLst/>
       </p:bgPr>
     </p:bg>
@@ -3619,9 +3634,7 @@
           <a:prstGeom prst="rect">
             <a:avLst/>
           </a:prstGeom>
-          <a:solidFill>
-            <a:srgbClr val="146B4A"/>
-          </a:solidFill>
+          <a:solidFill>val="007A55"/&gt;</a:solidFill>
           <a:ln>
             <a:noFill/>
           </a:ln>
@@ -3663,9 +3676,7 @@
           <a:prstGeom prst="rect">
             <a:avLst/>
           </a:prstGeom>
-          <a:solidFill>
-            <a:srgbClr val="FFD700"/>
-          </a:solidFill>
+          <a:solidFill>val="F0B429"/&gt;</a:solidFill>
           <a:ln>
             <a:noFill/>
           </a:ln>
@@ -3707,9 +3718,7 @@
           <a:prstGeom prst="rect">
             <a:avLst/>
           </a:prstGeom>
-          <a:solidFill>
-            <a:srgbClr val="FFD700"/>
-          </a:solidFill>
+          <a:solidFill>val="F0B429"/&gt;</a:solidFill>
           <a:ln>
             <a:noFill/>
           </a:ln>
@@ -3751,9 +3760,7 @@
           <a:prstGeom prst="rect">
             <a:avLst/>
           </a:prstGeom>
-          <a:solidFill>
-            <a:srgbClr val="146B4A"/>
-          </a:solidFill>
+          <a:solidFill>val="007A55"/&gt;</a:solidFill>
           <a:ln>
             <a:noFill/>
           </a:ln>
@@ -3806,10 +3813,8 @@
             <a:pPr algn="l"/>
             <a:r>
               <a:rPr sz="2400" b="1" i="0">
-                <a:solidFill>
-                  <a:srgbClr val="FFD700"/>
-                </a:solidFill>
-                <a:latin typeface="Calibri"/>
+                <a:solidFill>val="F0B429"/&gt;</a:solidFill>
+                <a:latin typeface="Poppins"/>
               </a:rPr>
               <a:t>4 - Impact of ICT on Society</a:t>
             </a:r>
@@ -3830,9 +3835,7 @@
           <a:prstGeom prst="rect">
             <a:avLst/>
           </a:prstGeom>
-          <a:solidFill>
-            <a:srgbClr val="146B4A"/>
-          </a:solidFill>
+          <a:solidFill>val="007A55"/&gt;</a:solidFill>
           <a:ln>
             <a:noFill/>
           </a:ln>
@@ -3889,10 +3892,8 @@
             </a:pPr>
             <a:r>
               <a:rPr sz="1800">
-                <a:solidFill>
-                  <a:srgbClr val="FFFFFF"/>
-                </a:solidFill>
-                <a:latin typeface="Calibri"/>
+                <a:solidFill>val="FFFFFF"/&gt;</a:solidFill>
+                <a:latin typeface="Poppins"/>
               </a:rPr>
               <a:t>▪  Instant worldwide communication.</a:t>
             </a:r>
@@ -3905,10 +3906,8 @@
             </a:pPr>
             <a:r>
               <a:rPr sz="1800">
-                <a:solidFill>
-                  <a:srgbClr val="FFFFFF"/>
-                </a:solidFill>
-                <a:latin typeface="Calibri"/>
+                <a:solidFill>val="FFFFFF"/&gt;</a:solidFill>
+                <a:latin typeface="Poppins"/>
               </a:rPr>
               <a:t>▪  Access to knowledge: digital libraries, online courses (MOOCs).</a:t>
             </a:r>
@@ -3921,10 +3920,8 @@
             </a:pPr>
             <a:r>
               <a:rPr sz="1800">
-                <a:solidFill>
-                  <a:srgbClr val="FFFFFF"/>
-                </a:solidFill>
-                <a:latin typeface="Calibri"/>
+                <a:solidFill>val="FFFFFF"/&gt;</a:solidFill>
+                <a:latin typeface="Poppins"/>
               </a:rPr>
               <a:t>▪  Transformation of work: teleworking, office automation, automation.</a:t>
             </a:r>
@@ -3937,10 +3934,8 @@
             </a:pPr>
             <a:r>
               <a:rPr sz="1800">
-                <a:solidFill>
-                  <a:srgbClr val="FFFFFF"/>
-                </a:solidFill>
-                <a:latin typeface="Calibri"/>
+                <a:solidFill>val="FFFFFF"/&gt;</a:solidFill>
+                <a:latin typeface="Poppins"/>
               </a:rPr>
               <a:t>▪  New professions: developer, network administrator, data scientist.</a:t>
             </a:r>
@@ -3953,10 +3948,8 @@
             </a:pPr>
             <a:r>
               <a:rPr sz="1800">
-                <a:solidFill>
-                  <a:srgbClr val="FFFFFF"/>
-                </a:solidFill>
-                <a:latin typeface="Calibri"/>
+                <a:solidFill>val="FFFFFF"/&gt;</a:solidFill>
+                <a:latin typeface="Poppins"/>
               </a:rPr>
               <a:t>▪  Challenges: digital divide, data protection, dependence.</a:t>
             </a:r>
@@ -3987,6 +3980,47 @@
           </a:prstGeom>
         </p:spPr>
       </p:pic>
+      <p:sp>
+        <p:nvSpPr>
+          <p:cNvPr id="990001" name="Pied de page FLE"/>
+          <p:cNvSpPr>
+            <a:spLocks noGrp="1"/>
+          </p:cNvSpPr>
+          <p:nvPr/>
+        </p:nvSpPr>
+        <p:spPr>
+          <a:xfrm>
+            <a:off x="4343400" y="-329184"/>
+            <a:ext cx="4572000" cy="274320"/>
+          </a:xfrm>
+          <a:prstGeom prst="rect">
+            <a:avLst/>
+          </a:prstGeom>
+        </p:spPr>
+        <p:txBody>
+          <a:bodyPr anchor="b"/>
+          <a:lstStyle/>
+          <a:p>
+            <a:pPr algn="r">
+              <a:defRPr sz="900">
+                <a:solidFill>
+                  <a:srgbClr val="9AA7B6"/>
+                </a:solidFill>
+                <a:latin typeface="Poppins"/>
+              </a:defRPr>
+            </a:pPr>
+            <a:r>
+              <a:rPr lang="fr-FR" sz="900">
+                <a:solidFill>
+                  <a:srgbClr val="9AA7B6"/>
+                </a:solidFill>
+                <a:latin typeface="Poppins"/>
+              </a:rPr>
+              <a:t>Université de Mostaganem — Dr. Madani BELACEL</a:t>
+            </a:r>
+          </a:p>
+        </p:txBody>
+      </p:sp>
     </p:spTree>
   </p:cSld>
   <p:clrMapOvr>
@@ -4000,9 +4034,7 @@
   <p:cSld>
     <p:bg>
       <p:bgPr>
-        <a:solidFill>
-          <a:srgbClr val="0B3D2E"/>
-        </a:solidFill>
+        <a:solidFill>val="004A38"/&gt;</a:solidFill>
         <a:effectLst/>
       </p:bgPr>
     </p:bg>
@@ -4027,9 +4059,7 @@
           <a:prstGeom prst="rect">
             <a:avLst/>
           </a:prstGeom>
-          <a:solidFill>
-            <a:srgbClr val="146B4A"/>
-          </a:solidFill>
+          <a:solidFill>val="007A55"/&gt;</a:solidFill>
           <a:ln>
             <a:noFill/>
           </a:ln>
@@ -4071,9 +4101,7 @@
           <a:prstGeom prst="rect">
             <a:avLst/>
           </a:prstGeom>
-          <a:solidFill>
-            <a:srgbClr val="FFD700"/>
-          </a:solidFill>
+          <a:solidFill>val="F0B429"/&gt;</a:solidFill>
           <a:ln>
             <a:noFill/>
           </a:ln>
@@ -4115,9 +4143,7 @@
           <a:prstGeom prst="rect">
             <a:avLst/>
           </a:prstGeom>
-          <a:solidFill>
-            <a:srgbClr val="FFD700"/>
-          </a:solidFill>
+          <a:solidFill>val="F0B429"/&gt;</a:solidFill>
           <a:ln>
             <a:noFill/>
           </a:ln>
@@ -4159,9 +4185,7 @@
           <a:prstGeom prst="rect">
             <a:avLst/>
           </a:prstGeom>
-          <a:solidFill>
-            <a:srgbClr val="146B4A"/>
-          </a:solidFill>
+          <a:solidFill>val="007A55"/&gt;</a:solidFill>
           <a:ln>
             <a:noFill/>
           </a:ln>
@@ -4203,9 +4227,7 @@
           <a:prstGeom prst="rect">
             <a:avLst/>
           </a:prstGeom>
-          <a:solidFill>
-            <a:srgbClr val="146B4A"/>
-          </a:solidFill>
+          <a:solidFill>val="007A55"/&gt;</a:solidFill>
           <a:ln>
             <a:noFill/>
           </a:ln>
@@ -4258,10 +4280,8 @@
             <a:pPr algn="ctr"/>
             <a:r>
               <a:rPr sz="2200" b="1" i="0">
-                <a:solidFill>
-                  <a:srgbClr val="BBBBBB"/>
-                </a:solidFill>
-                <a:latin typeface="Calibri"/>
+                <a:solidFill>val="9AA7B6"/&gt;</a:solidFill>
+                <a:latin typeface="Poppins"/>
               </a:rPr>
               <a:t>Section 5</a:t>
             </a:r>
@@ -4293,10 +4313,8 @@
             <a:pPr algn="ctr"/>
             <a:r>
               <a:rPr sz="2800" b="1" i="0">
-                <a:solidFill>
-                  <a:srgbClr val="FFD700"/>
-                </a:solidFill>
-                <a:latin typeface="Calibri"/>
+                <a:solidFill>val="F0B429"/&gt;</a:solidFill>
+                <a:latin typeface="Poppins"/>
               </a:rPr>
               <a:t>ICT in Education</a:t>
             </a:r>
@@ -4327,6 +4345,47 @@
           </a:prstGeom>
         </p:spPr>
       </p:pic>
+      <p:sp>
+        <p:nvSpPr>
+          <p:cNvPr id="990001" name="Pied de page FLE"/>
+          <p:cNvSpPr>
+            <a:spLocks noGrp="1"/>
+          </p:cNvSpPr>
+          <p:nvPr/>
+        </p:nvSpPr>
+        <p:spPr>
+          <a:xfrm>
+            <a:off x="4343400" y="-329184"/>
+            <a:ext cx="4572000" cy="274320"/>
+          </a:xfrm>
+          <a:prstGeom prst="rect">
+            <a:avLst/>
+          </a:prstGeom>
+        </p:spPr>
+        <p:txBody>
+          <a:bodyPr anchor="b"/>
+          <a:lstStyle/>
+          <a:p>
+            <a:pPr algn="r">
+              <a:defRPr sz="900">
+                <a:solidFill>
+                  <a:srgbClr val="9AA7B6"/>
+                </a:solidFill>
+                <a:latin typeface="Poppins"/>
+              </a:defRPr>
+            </a:pPr>
+            <a:r>
+              <a:rPr lang="fr-FR" sz="900">
+                <a:solidFill>
+                  <a:srgbClr val="9AA7B6"/>
+                </a:solidFill>
+                <a:latin typeface="Poppins"/>
+              </a:rPr>
+              <a:t>Université de Mostaganem — Dr. Madani BELACEL</a:t>
+            </a:r>
+          </a:p>
+        </p:txBody>
+      </p:sp>
     </p:spTree>
   </p:cSld>
   <p:clrMapOvr>
@@ -4340,9 +4399,7 @@
   <p:cSld>
     <p:bg>
       <p:bgPr>
-        <a:solidFill>
-          <a:srgbClr val="0B3D2E"/>
-        </a:solidFill>
+        <a:solidFill>val="004A38"/&gt;</a:solidFill>
         <a:effectLst/>
       </p:bgPr>
     </p:bg>
@@ -4367,9 +4424,7 @@
           <a:prstGeom prst="rect">
             <a:avLst/>
           </a:prstGeom>
-          <a:solidFill>
-            <a:srgbClr val="146B4A"/>
-          </a:solidFill>
+          <a:solidFill>val="007A55"/&gt;</a:solidFill>
           <a:ln>
             <a:noFill/>
           </a:ln>
@@ -4411,9 +4466,7 @@
           <a:prstGeom prst="rect">
             <a:avLst/>
           </a:prstGeom>
-          <a:solidFill>
-            <a:srgbClr val="FFD700"/>
-          </a:solidFill>
+          <a:solidFill>val="F0B429"/&gt;</a:solidFill>
           <a:ln>
             <a:noFill/>
           </a:ln>
@@ -4455,9 +4508,7 @@
           <a:prstGeom prst="rect">
             <a:avLst/>
           </a:prstGeom>
-          <a:solidFill>
-            <a:srgbClr val="FFD700"/>
-          </a:solidFill>
+          <a:solidFill>val="F0B429"/&gt;</a:solidFill>
           <a:ln>
             <a:noFill/>
           </a:ln>
@@ -4499,9 +4550,7 @@
           <a:prstGeom prst="rect">
             <a:avLst/>
           </a:prstGeom>
-          <a:solidFill>
-            <a:srgbClr val="146B4A"/>
-          </a:solidFill>
+          <a:solidFill>val="007A55"/&gt;</a:solidFill>
           <a:ln>
             <a:noFill/>
           </a:ln>
@@ -4554,10 +4603,8 @@
             <a:pPr algn="l"/>
             <a:r>
               <a:rPr sz="2400" b="1" i="0">
-                <a:solidFill>
-                  <a:srgbClr val="FFD700"/>
-                </a:solidFill>
-                <a:latin typeface="Calibri"/>
+                <a:solidFill>val="F0B429"/&gt;</a:solidFill>
+                <a:latin typeface="Poppins"/>
               </a:rPr>
               <a:t>5 - ICT in Education</a:t>
             </a:r>
@@ -4578,9 +4625,7 @@
           <a:prstGeom prst="rect">
             <a:avLst/>
           </a:prstGeom>
-          <a:solidFill>
-            <a:srgbClr val="146B4A"/>
-          </a:solidFill>
+          <a:solidFill>val="007A55"/&gt;</a:solidFill>
           <a:ln>
             <a:noFill/>
           </a:ln>
@@ -4637,10 +4682,8 @@
             </a:pPr>
             <a:r>
               <a:rPr sz="1800">
-                <a:solidFill>
-                  <a:srgbClr val="FFFFFF"/>
-                </a:solidFill>
-                <a:latin typeface="Calibri"/>
+                <a:solidFill>val="FFFFFF"/&gt;</a:solidFill>
+                <a:latin typeface="Poppins"/>
               </a:rPr>
               <a:t>▪  Interactive whiteboards and projectors in classrooms.</a:t>
             </a:r>
@@ -4653,10 +4696,8 @@
             </a:pPr>
             <a:r>
               <a:rPr sz="1800">
-                <a:solidFill>
-                  <a:srgbClr val="FFFFFF"/>
-                </a:solidFill>
-                <a:latin typeface="Calibri"/>
+                <a:solidFill>val="FFFFFF"/&gt;</a:solidFill>
+                <a:latin typeface="Poppins"/>
               </a:rPr>
               <a:t>▪  E-learning platforms: Moodle, Google Classroom, Teams.</a:t>
             </a:r>
@@ -4669,10 +4710,8 @@
             </a:pPr>
             <a:r>
               <a:rPr sz="1800">
-                <a:solidFill>
-                  <a:srgbClr val="FFFFFF"/>
-                </a:solidFill>
-                <a:latin typeface="Calibri"/>
+                <a:solidFill>val="FFFFFF"/&gt;</a:solidFill>
+                <a:latin typeface="Poppins"/>
               </a:rPr>
               <a:t>▪  Digital learning resources: videos, simulations, quizzes.</a:t>
             </a:r>
@@ -4685,10 +4724,8 @@
             </a:pPr>
             <a:r>
               <a:rPr sz="1800">
-                <a:solidFill>
-                  <a:srgbClr val="FFFFFF"/>
-                </a:solidFill>
-                <a:latin typeface="Calibri"/>
+                <a:solidFill>val="FFFFFF"/&gt;</a:solidFill>
+                <a:latin typeface="Poppins"/>
               </a:rPr>
               <a:t>▪  Distance learning and hybrid classrooms.</a:t>
             </a:r>
@@ -4701,10 +4738,8 @@
             </a:pPr>
             <a:r>
               <a:rPr sz="1800">
-                <a:solidFill>
-                  <a:srgbClr val="FFFFFF"/>
-                </a:solidFill>
-                <a:latin typeface="Calibri"/>
+                <a:solidFill>val="FFFFFF"/&gt;</a:solidFill>
+                <a:latin typeface="Poppins"/>
               </a:rPr>
               <a:t>▪  Individualized learning tracking through digital tools.</a:t>
             </a:r>
@@ -4735,6 +4770,47 @@
           </a:prstGeom>
         </p:spPr>
       </p:pic>
+      <p:sp>
+        <p:nvSpPr>
+          <p:cNvPr id="990001" name="Pied de page FLE"/>
+          <p:cNvSpPr>
+            <a:spLocks noGrp="1"/>
+          </p:cNvSpPr>
+          <p:nvPr/>
+        </p:nvSpPr>
+        <p:spPr>
+          <a:xfrm>
+            <a:off x="4343400" y="-329184"/>
+            <a:ext cx="4572000" cy="274320"/>
+          </a:xfrm>
+          <a:prstGeom prst="rect">
+            <a:avLst/>
+          </a:prstGeom>
+        </p:spPr>
+        <p:txBody>
+          <a:bodyPr anchor="b"/>
+          <a:lstStyle/>
+          <a:p>
+            <a:pPr algn="r">
+              <a:defRPr sz="900">
+                <a:solidFill>
+                  <a:srgbClr val="9AA7B6"/>
+                </a:solidFill>
+                <a:latin typeface="Poppins"/>
+              </a:defRPr>
+            </a:pPr>
+            <a:r>
+              <a:rPr lang="fr-FR" sz="900">
+                <a:solidFill>
+                  <a:srgbClr val="9AA7B6"/>
+                </a:solidFill>
+                <a:latin typeface="Poppins"/>
+              </a:rPr>
+              <a:t>Université de Mostaganem — Dr. Madani BELACEL</a:t>
+            </a:r>
+          </a:p>
+        </p:txBody>
+      </p:sp>
     </p:spTree>
   </p:cSld>
   <p:clrMapOvr>
@@ -4748,9 +4824,7 @@
   <p:cSld>
     <p:bg>
       <p:bgPr>
-        <a:solidFill>
-          <a:srgbClr val="0B3D2E"/>
-        </a:solidFill>
+        <a:solidFill>val="004A38"/&gt;</a:solidFill>
         <a:effectLst/>
       </p:bgPr>
     </p:bg>
@@ -4775,9 +4849,7 @@
           <a:prstGeom prst="rect">
             <a:avLst/>
           </a:prstGeom>
-          <a:solidFill>
-            <a:srgbClr val="146B4A"/>
-          </a:solidFill>
+          <a:solidFill>val="007A55"/&gt;</a:solidFill>
           <a:ln>
             <a:noFill/>
           </a:ln>
@@ -4819,9 +4891,7 @@
           <a:prstGeom prst="rect">
             <a:avLst/>
           </a:prstGeom>
-          <a:solidFill>
-            <a:srgbClr val="FFD700"/>
-          </a:solidFill>
+          <a:solidFill>val="F0B429"/&gt;</a:solidFill>
           <a:ln>
             <a:noFill/>
           </a:ln>
@@ -4863,9 +4933,7 @@
           <a:prstGeom prst="rect">
             <a:avLst/>
           </a:prstGeom>
-          <a:solidFill>
-            <a:srgbClr val="FFD700"/>
-          </a:solidFill>
+          <a:solidFill>val="F0B429"/&gt;</a:solidFill>
           <a:ln>
             <a:noFill/>
           </a:ln>
@@ -4907,9 +4975,7 @@
           <a:prstGeom prst="rect">
             <a:avLst/>
           </a:prstGeom>
-          <a:solidFill>
-            <a:srgbClr val="146B4A"/>
-          </a:solidFill>
+          <a:solidFill>val="007A55"/&gt;</a:solidFill>
           <a:ln>
             <a:noFill/>
           </a:ln>
@@ -4951,9 +5017,7 @@
           <a:prstGeom prst="rect">
             <a:avLst/>
           </a:prstGeom>
-          <a:solidFill>
-            <a:srgbClr val="146B4A"/>
-          </a:solidFill>
+          <a:solidFill>val="007A55"/&gt;</a:solidFill>
           <a:ln>
             <a:noFill/>
           </a:ln>
@@ -5006,10 +5070,8 @@
             <a:pPr algn="ctr"/>
             <a:r>
               <a:rPr sz="2200" b="1" i="0">
-                <a:solidFill>
-                  <a:srgbClr val="BBBBBB"/>
-                </a:solidFill>
-                <a:latin typeface="Calibri"/>
+                <a:solidFill>val="9AA7B6"/&gt;</a:solidFill>
+                <a:latin typeface="Poppins"/>
               </a:rPr>
               <a:t>Section 6</a:t>
             </a:r>
@@ -5041,10 +5103,8 @@
             <a:pPr algn="ctr"/>
             <a:r>
               <a:rPr sz="2800" b="1" i="0">
-                <a:solidFill>
-                  <a:srgbClr val="FFD700"/>
-                </a:solidFill>
-                <a:latin typeface="Calibri"/>
+                <a:solidFill>val="F0B429"/&gt;</a:solidFill>
+                <a:latin typeface="Poppins"/>
               </a:rPr>
               <a:t>Digital Basics: Key Concepts</a:t>
             </a:r>
@@ -5075,6 +5135,47 @@
           </a:prstGeom>
         </p:spPr>
       </p:pic>
+      <p:sp>
+        <p:nvSpPr>
+          <p:cNvPr id="990001" name="Pied de page FLE"/>
+          <p:cNvSpPr>
+            <a:spLocks noGrp="1"/>
+          </p:cNvSpPr>
+          <p:nvPr/>
+        </p:nvSpPr>
+        <p:spPr>
+          <a:xfrm>
+            <a:off x="4343400" y="-329184"/>
+            <a:ext cx="4572000" cy="274320"/>
+          </a:xfrm>
+          <a:prstGeom prst="rect">
+            <a:avLst/>
+          </a:prstGeom>
+        </p:spPr>
+        <p:txBody>
+          <a:bodyPr anchor="b"/>
+          <a:lstStyle/>
+          <a:p>
+            <a:pPr algn="r">
+              <a:defRPr sz="900">
+                <a:solidFill>
+                  <a:srgbClr val="9AA7B6"/>
+                </a:solidFill>
+                <a:latin typeface="Poppins"/>
+              </a:defRPr>
+            </a:pPr>
+            <a:r>
+              <a:rPr lang="fr-FR" sz="900">
+                <a:solidFill>
+                  <a:srgbClr val="9AA7B6"/>
+                </a:solidFill>
+                <a:latin typeface="Poppins"/>
+              </a:rPr>
+              <a:t>Université de Mostaganem — Dr. Madani BELACEL</a:t>
+            </a:r>
+          </a:p>
+        </p:txBody>
+      </p:sp>
     </p:spTree>
   </p:cSld>
   <p:clrMapOvr>
@@ -5088,9 +5189,7 @@
   <p:cSld>
     <p:bg>
       <p:bgPr>
-        <a:solidFill>
-          <a:srgbClr val="0B3D2E"/>
-        </a:solidFill>
+        <a:solidFill>val="004A38"/&gt;</a:solidFill>
         <a:effectLst/>
       </p:bgPr>
     </p:bg>
@@ -5115,9 +5214,7 @@
           <a:prstGeom prst="rect">
             <a:avLst/>
           </a:prstGeom>
-          <a:solidFill>
-            <a:srgbClr val="146B4A"/>
-          </a:solidFill>
+          <a:solidFill>val="007A55"/&gt;</a:solidFill>
           <a:ln>
             <a:noFill/>
           </a:ln>
@@ -5159,9 +5256,7 @@
           <a:prstGeom prst="rect">
             <a:avLst/>
           </a:prstGeom>
-          <a:solidFill>
-            <a:srgbClr val="FFD700"/>
-          </a:solidFill>
+          <a:solidFill>val="F0B429"/&gt;</a:solidFill>
           <a:ln>
             <a:noFill/>
           </a:ln>
@@ -5203,9 +5298,7 @@
           <a:prstGeom prst="rect">
             <a:avLst/>
           </a:prstGeom>
-          <a:solidFill>
-            <a:srgbClr val="FFD700"/>
-          </a:solidFill>
+          <a:solidFill>val="F0B429"/&gt;</a:solidFill>
           <a:ln>
             <a:noFill/>
           </a:ln>
@@ -5247,9 +5340,7 @@
           <a:prstGeom prst="rect">
             <a:avLst/>
           </a:prstGeom>
-          <a:solidFill>
-            <a:srgbClr val="146B4A"/>
-          </a:solidFill>
+          <a:solidFill>val="007A55"/&gt;</a:solidFill>
           <a:ln>
             <a:noFill/>
           </a:ln>
@@ -5302,10 +5393,8 @@
             <a:pPr algn="l"/>
             <a:r>
               <a:rPr sz="2400" b="1" i="0">
-                <a:solidFill>
-                  <a:srgbClr val="FFD700"/>
-                </a:solidFill>
-                <a:latin typeface="Calibri"/>
+                <a:solidFill>val="F0B429"/&gt;</a:solidFill>
+                <a:latin typeface="Poppins"/>
               </a:rPr>
               <a:t>6 - Digital Basics: Key Concepts</a:t>
             </a:r>
@@ -5326,9 +5415,7 @@
           <a:prstGeom prst="rect">
             <a:avLst/>
           </a:prstGeom>
-          <a:solidFill>
-            <a:srgbClr val="146B4A"/>
-          </a:solidFill>
+          <a:solidFill>val="007A55"/&gt;</a:solidFill>
           <a:ln>
             <a:noFill/>
           </a:ln>
@@ -5385,10 +5472,8 @@
             </a:pPr>
             <a:r>
               <a:rPr sz="1800">
-                <a:solidFill>
-                  <a:srgbClr val="FFFFFF"/>
-                </a:solidFill>
-                <a:latin typeface="Calibri"/>
+                <a:solidFill>val="FFFFFF"/&gt;</a:solidFill>
+                <a:latin typeface="Poppins"/>
               </a:rPr>
               <a:t>▪  Analog vs digital information.</a:t>
             </a:r>
@@ -5401,10 +5486,8 @@
             </a:pPr>
             <a:r>
               <a:rPr sz="1800">
-                <a:solidFill>
-                  <a:srgbClr val="FFFFFF"/>
-                </a:solidFill>
-                <a:latin typeface="Calibri"/>
+                <a:solidFill>val="FFFFFF"/&gt;</a:solidFill>
+                <a:latin typeface="Poppins"/>
               </a:rPr>
               <a:t>▪  The bit (0 or 1): the elementary unit of information.</a:t>
             </a:r>
@@ -5417,10 +5500,8 @@
             </a:pPr>
             <a:r>
               <a:rPr sz="1800">
-                <a:solidFill>
-                  <a:srgbClr val="FFFFFF"/>
-                </a:solidFill>
-                <a:latin typeface="Calibri"/>
+                <a:solidFill>val="FFFFFF"/&gt;</a:solidFill>
+                <a:latin typeface="Poppins"/>
               </a:rPr>
               <a:t>▪  Byte = 8 bits; multiples: KB, MB, GB, TB.</a:t>
             </a:r>
@@ -5433,10 +5514,8 @@
             </a:pPr>
             <a:r>
               <a:rPr sz="1800">
-                <a:solidFill>
-                  <a:srgbClr val="FFFFFF"/>
-                </a:solidFill>
-                <a:latin typeface="Calibri"/>
+                <a:solidFill>val="FFFFFF"/&gt;</a:solidFill>
+                <a:latin typeface="Poppins"/>
               </a:rPr>
               <a:t>▪  Binary coding of all data: text, images, sound.</a:t>
             </a:r>
@@ -5449,10 +5528,8 @@
             </a:pPr>
             <a:r>
               <a:rPr sz="1800">
-                <a:solidFill>
-                  <a:srgbClr val="FFFFFF"/>
-                </a:solidFill>
-                <a:latin typeface="Calibri"/>
+                <a:solidFill>val="FFFFFF"/&gt;</a:solidFill>
+                <a:latin typeface="Poppins"/>
               </a:rPr>
               <a:t>▪  Storage capacity and processing speed.</a:t>
             </a:r>
@@ -5483,6 +5560,47 @@
           </a:prstGeom>
         </p:spPr>
       </p:pic>
+      <p:sp>
+        <p:nvSpPr>
+          <p:cNvPr id="990001" name="Pied de page FLE"/>
+          <p:cNvSpPr>
+            <a:spLocks noGrp="1"/>
+          </p:cNvSpPr>
+          <p:nvPr/>
+        </p:nvSpPr>
+        <p:spPr>
+          <a:xfrm>
+            <a:off x="4343400" y="-329184"/>
+            <a:ext cx="4572000" cy="274320"/>
+          </a:xfrm>
+          <a:prstGeom prst="rect">
+            <a:avLst/>
+          </a:prstGeom>
+        </p:spPr>
+        <p:txBody>
+          <a:bodyPr anchor="b"/>
+          <a:lstStyle/>
+          <a:p>
+            <a:pPr algn="r">
+              <a:defRPr sz="900">
+                <a:solidFill>
+                  <a:srgbClr val="9AA7B6"/>
+                </a:solidFill>
+                <a:latin typeface="Poppins"/>
+              </a:defRPr>
+            </a:pPr>
+            <a:r>
+              <a:rPr lang="fr-FR" sz="900">
+                <a:solidFill>
+                  <a:srgbClr val="9AA7B6"/>
+                </a:solidFill>
+                <a:latin typeface="Poppins"/>
+              </a:rPr>
+              <a:t>Université de Mostaganem — Dr. Madani BELACEL</a:t>
+            </a:r>
+          </a:p>
+        </p:txBody>
+      </p:sp>
     </p:spTree>
   </p:cSld>
   <p:clrMapOvr>
@@ -5496,9 +5614,7 @@
   <p:cSld>
     <p:bg>
       <p:bgPr>
-        <a:solidFill>
-          <a:srgbClr val="0B3D2E"/>
-        </a:solidFill>
+        <a:solidFill>val="004A38"/&gt;</a:solidFill>
         <a:effectLst/>
       </p:bgPr>
     </p:bg>
@@ -5523,9 +5639,7 @@
           <a:prstGeom prst="rect">
             <a:avLst/>
           </a:prstGeom>
-          <a:solidFill>
-            <a:srgbClr val="146B4A"/>
-          </a:solidFill>
+          <a:solidFill>val="007A55"/&gt;</a:solidFill>
           <a:ln>
             <a:noFill/>
           </a:ln>
@@ -5567,9 +5681,7 @@
           <a:prstGeom prst="rect">
             <a:avLst/>
           </a:prstGeom>
-          <a:solidFill>
-            <a:srgbClr val="FFD700"/>
-          </a:solidFill>
+          <a:solidFill>val="F0B429"/&gt;</a:solidFill>
           <a:ln>
             <a:noFill/>
           </a:ln>
@@ -5611,9 +5723,7 @@
           <a:prstGeom prst="rect">
             <a:avLst/>
           </a:prstGeom>
-          <a:solidFill>
-            <a:srgbClr val="FFD700"/>
-          </a:solidFill>
+          <a:solidFill>val="F0B429"/&gt;</a:solidFill>
           <a:ln>
             <a:noFill/>
           </a:ln>
@@ -5655,9 +5765,7 @@
           <a:prstGeom prst="rect">
             <a:avLst/>
           </a:prstGeom>
-          <a:solidFill>
-            <a:srgbClr val="146B4A"/>
-          </a:solidFill>
+          <a:solidFill>val="007A55"/&gt;</a:solidFill>
           <a:ln>
             <a:noFill/>
           </a:ln>
@@ -5699,9 +5807,7 @@
           <a:prstGeom prst="rect">
             <a:avLst/>
           </a:prstGeom>
-          <a:solidFill>
-            <a:srgbClr val="146B4A"/>
-          </a:solidFill>
+          <a:solidFill>val="007A55"/&gt;</a:solidFill>
           <a:ln>
             <a:noFill/>
           </a:ln>
@@ -5754,10 +5860,8 @@
             <a:pPr algn="ctr"/>
             <a:r>
               <a:rPr sz="2200" b="1" i="0">
-                <a:solidFill>
-                  <a:srgbClr val="BBBBBB"/>
-                </a:solidFill>
-                <a:latin typeface="Calibri"/>
+                <a:solidFill>val="9AA7B6"/&gt;</a:solidFill>
+                <a:latin typeface="Poppins"/>
               </a:rPr>
               <a:t>Section 7</a:t>
             </a:r>
@@ -5789,10 +5893,8 @@
             <a:pPr algn="ctr"/>
             <a:r>
               <a:rPr sz="2800" b="1" i="0">
-                <a:solidFill>
-                  <a:srgbClr val="FFD700"/>
-                </a:solidFill>
-                <a:latin typeface="Calibri"/>
+                <a:solidFill>val="F0B429"/&gt;</a:solidFill>
+                <a:latin typeface="Poppins"/>
               </a:rPr>
               <a:t>Outlook and Trends</a:t>
             </a:r>
@@ -5823,6 +5925,47 @@
           </a:prstGeom>
         </p:spPr>
       </p:pic>
+      <p:sp>
+        <p:nvSpPr>
+          <p:cNvPr id="990001" name="Pied de page FLE"/>
+          <p:cNvSpPr>
+            <a:spLocks noGrp="1"/>
+          </p:cNvSpPr>
+          <p:nvPr/>
+        </p:nvSpPr>
+        <p:spPr>
+          <a:xfrm>
+            <a:off x="4343400" y="-329184"/>
+            <a:ext cx="4572000" cy="274320"/>
+          </a:xfrm>
+          <a:prstGeom prst="rect">
+            <a:avLst/>
+          </a:prstGeom>
+        </p:spPr>
+        <p:txBody>
+          <a:bodyPr anchor="b"/>
+          <a:lstStyle/>
+          <a:p>
+            <a:pPr algn="r">
+              <a:defRPr sz="900">
+                <a:solidFill>
+                  <a:srgbClr val="9AA7B6"/>
+                </a:solidFill>
+                <a:latin typeface="Poppins"/>
+              </a:defRPr>
+            </a:pPr>
+            <a:r>
+              <a:rPr lang="fr-FR" sz="900">
+                <a:solidFill>
+                  <a:srgbClr val="9AA7B6"/>
+                </a:solidFill>
+                <a:latin typeface="Poppins"/>
+              </a:rPr>
+              <a:t>Université de Mostaganem — Dr. Madani BELACEL</a:t>
+            </a:r>
+          </a:p>
+        </p:txBody>
+      </p:sp>
     </p:spTree>
   </p:cSld>
   <p:clrMapOvr>
@@ -5836,9 +5979,7 @@
   <p:cSld>
     <p:bg>
       <p:bgPr>
-        <a:solidFill>
-          <a:srgbClr val="0B3D2E"/>
-        </a:solidFill>
+        <a:solidFill>val="004A38"/&gt;</a:solidFill>
         <a:effectLst/>
       </p:bgPr>
     </p:bg>
@@ -5863,9 +6004,7 @@
           <a:prstGeom prst="rect">
             <a:avLst/>
           </a:prstGeom>
-          <a:solidFill>
-            <a:srgbClr val="146B4A"/>
-          </a:solidFill>
+          <a:solidFill>val="007A55"/&gt;</a:solidFill>
           <a:ln>
             <a:noFill/>
           </a:ln>
@@ -5907,9 +6046,7 @@
           <a:prstGeom prst="rect">
             <a:avLst/>
           </a:prstGeom>
-          <a:solidFill>
-            <a:srgbClr val="FFD700"/>
-          </a:solidFill>
+          <a:solidFill>val="F0B429"/&gt;</a:solidFill>
           <a:ln>
             <a:noFill/>
           </a:ln>
@@ -5951,9 +6088,7 @@
           <a:prstGeom prst="rect">
             <a:avLst/>
           </a:prstGeom>
-          <a:solidFill>
-            <a:srgbClr val="FFD700"/>
-          </a:solidFill>
+          <a:solidFill>val="F0B429"/&gt;</a:solidFill>
           <a:ln>
             <a:noFill/>
           </a:ln>
@@ -5995,9 +6130,7 @@
           <a:prstGeom prst="rect">
             <a:avLst/>
           </a:prstGeom>
-          <a:solidFill>
-            <a:srgbClr val="146B4A"/>
-          </a:solidFill>
+          <a:solidFill>val="007A55"/&gt;</a:solidFill>
           <a:ln>
             <a:noFill/>
           </a:ln>
@@ -6050,10 +6183,8 @@
             <a:pPr algn="l"/>
             <a:r>
               <a:rPr sz="2400" b="1" i="0">
-                <a:solidFill>
-                  <a:srgbClr val="FFD700"/>
-                </a:solidFill>
-                <a:latin typeface="Calibri"/>
+                <a:solidFill>val="F0B429"/&gt;</a:solidFill>
+                <a:latin typeface="Poppins"/>
               </a:rPr>
               <a:t>7 - Outlook and Trends</a:t>
             </a:r>
@@ -6074,9 +6205,7 @@
           <a:prstGeom prst="rect">
             <a:avLst/>
           </a:prstGeom>
-          <a:solidFill>
-            <a:srgbClr val="146B4A"/>
-          </a:solidFill>
+          <a:solidFill>val="007A55"/&gt;</a:solidFill>
           <a:ln>
             <a:noFill/>
           </a:ln>
@@ -6133,10 +6262,8 @@
             </a:pPr>
             <a:r>
               <a:rPr sz="1800">
-                <a:solidFill>
-                  <a:srgbClr val="FFFFFF"/>
-                </a:solidFill>
-                <a:latin typeface="Calibri"/>
+                <a:solidFill>val="FFFFFF"/&gt;</a:solidFill>
+                <a:latin typeface="Poppins"/>
               </a:rPr>
               <a:t>▪  Artificial intelligence and machine learning.</a:t>
             </a:r>
@@ -6149,10 +6276,8 @@
             </a:pPr>
             <a:r>
               <a:rPr sz="1800">
-                <a:solidFill>
-                  <a:srgbClr val="FFFFFF"/>
-                </a:solidFill>
-                <a:latin typeface="Calibri"/>
+                <a:solidFill>val="FFFFFF"/&gt;</a:solidFill>
+                <a:latin typeface="Poppins"/>
               </a:rPr>
               <a:t>▪  Cloud computing: online storage and services.</a:t>
             </a:r>
@@ -6165,10 +6290,8 @@
             </a:pPr>
             <a:r>
               <a:rPr sz="1800">
-                <a:solidFill>
-                  <a:srgbClr val="FFFFFF"/>
-                </a:solidFill>
-                <a:latin typeface="Calibri"/>
+                <a:solidFill>val="FFFFFF"/&gt;</a:solidFill>
+                <a:latin typeface="Poppins"/>
               </a:rPr>
               <a:t>▪  Internet of Things (IoT) and smart cities.</a:t>
             </a:r>
@@ -6181,10 +6304,8 @@
             </a:pPr>
             <a:r>
               <a:rPr sz="1800">
-                <a:solidFill>
-                  <a:srgbClr val="FFFFFF"/>
-                </a:solidFill>
-                <a:latin typeface="Calibri"/>
+                <a:solidFill>val="FFFFFF"/&gt;</a:solidFill>
+                <a:latin typeface="Poppins"/>
               </a:rPr>
               <a:t>▪  Big data: analyzing massive datasets.</a:t>
             </a:r>
@@ -6197,10 +6318,8 @@
             </a:pPr>
             <a:r>
               <a:rPr sz="1800">
-                <a:solidFill>
-                  <a:srgbClr val="FFFFFF"/>
-                </a:solidFill>
-                <a:latin typeface="Calibri"/>
+                <a:solidFill>val="FFFFFF"/&gt;</a:solidFill>
+                <a:latin typeface="Poppins"/>
               </a:rPr>
               <a:t>▪  Cybersecurity: a major challenge of the digital age.</a:t>
             </a:r>
@@ -6231,6 +6350,47 @@
           </a:prstGeom>
         </p:spPr>
       </p:pic>
+      <p:sp>
+        <p:nvSpPr>
+          <p:cNvPr id="990001" name="Pied de page FLE"/>
+          <p:cNvSpPr>
+            <a:spLocks noGrp="1"/>
+          </p:cNvSpPr>
+          <p:nvPr/>
+        </p:nvSpPr>
+        <p:spPr>
+          <a:xfrm>
+            <a:off x="4343400" y="-329184"/>
+            <a:ext cx="4572000" cy="274320"/>
+          </a:xfrm>
+          <a:prstGeom prst="rect">
+            <a:avLst/>
+          </a:prstGeom>
+        </p:spPr>
+        <p:txBody>
+          <a:bodyPr anchor="b"/>
+          <a:lstStyle/>
+          <a:p>
+            <a:pPr algn="r">
+              <a:defRPr sz="900">
+                <a:solidFill>
+                  <a:srgbClr val="9AA7B6"/>
+                </a:solidFill>
+                <a:latin typeface="Poppins"/>
+              </a:defRPr>
+            </a:pPr>
+            <a:r>
+              <a:rPr lang="fr-FR" sz="900">
+                <a:solidFill>
+                  <a:srgbClr val="9AA7B6"/>
+                </a:solidFill>
+                <a:latin typeface="Poppins"/>
+              </a:rPr>
+              <a:t>Université de Mostaganem — Dr. Madani BELACEL</a:t>
+            </a:r>
+          </a:p>
+        </p:txBody>
+      </p:sp>
     </p:spTree>
   </p:cSld>
   <p:clrMapOvr>
@@ -6244,9 +6404,7 @@
   <p:cSld>
     <p:bg>
       <p:bgPr>
-        <a:solidFill>
-          <a:srgbClr val="FF8C00"/>
-        </a:solidFill>
+        <a:solidFill>val="F0B429"/&gt;</a:solidFill>
         <a:effectLst/>
       </p:bgPr>
     </p:bg>
@@ -6271,9 +6429,7 @@
           <a:prstGeom prst="rect">
             <a:avLst/>
           </a:prstGeom>
-          <a:solidFill>
-            <a:srgbClr val="146B4A"/>
-          </a:solidFill>
+          <a:solidFill>val="007A55"/&gt;</a:solidFill>
           <a:ln>
             <a:noFill/>
           </a:ln>
@@ -6315,9 +6471,7 @@
           <a:prstGeom prst="rect">
             <a:avLst/>
           </a:prstGeom>
-          <a:solidFill>
-            <a:srgbClr val="FFD700"/>
-          </a:solidFill>
+          <a:solidFill>val="F0B429"/&gt;</a:solidFill>
           <a:ln>
             <a:noFill/>
           </a:ln>
@@ -6359,9 +6513,7 @@
           <a:prstGeom prst="rect">
             <a:avLst/>
           </a:prstGeom>
-          <a:solidFill>
-            <a:srgbClr val="FFD700"/>
-          </a:solidFill>
+          <a:solidFill>val="F0B429"/&gt;</a:solidFill>
           <a:ln>
             <a:noFill/>
           </a:ln>
@@ -6403,9 +6555,7 @@
           <a:prstGeom prst="rect">
             <a:avLst/>
           </a:prstGeom>
-          <a:solidFill>
-            <a:srgbClr val="146B4A"/>
-          </a:solidFill>
+          <a:solidFill>val="007A55"/&gt;</a:solidFill>
           <a:ln>
             <a:noFill/>
           </a:ln>
@@ -6458,10 +6608,8 @@
             <a:pPr algn="ctr"/>
             <a:r>
               <a:rPr sz="3000" b="1" i="0">
-                <a:solidFill>
-                  <a:srgbClr val="0B3D2E"/>
-                </a:solidFill>
-                <a:latin typeface="Calibri"/>
+                <a:solidFill>val="004A38"/&gt;</a:solidFill>
+                <a:latin typeface="Poppins"/>
               </a:rPr>
               <a:t>Practical Interest</a:t>
             </a:r>
@@ -6497,10 +6645,8 @@
             </a:pPr>
             <a:r>
               <a:rPr sz="1700">
-                <a:solidFill>
-                  <a:srgbClr val="0B3D2E"/>
-                </a:solidFill>
-                <a:latin typeface="Calibri"/>
+                <a:solidFill>val="004A38"/&gt;</a:solidFill>
+                <a:latin typeface="Poppins"/>
               </a:rPr>
               <a:t>▪  ICT is present in every field: health, banking, commerce, education.</a:t>
             </a:r>
@@ -6513,10 +6659,8 @@
             </a:pPr>
             <a:r>
               <a:rPr sz="1700">
-                <a:solidFill>
-                  <a:srgbClr val="0B3D2E"/>
-                </a:solidFill>
-                <a:latin typeface="Calibri"/>
+                <a:solidFill>val="004A38"/&gt;</a:solidFill>
+                <a:latin typeface="Poppins"/>
               </a:rPr>
               <a:t>▪  Mastering ICT is an essential professional skill.</a:t>
             </a:r>
@@ -6529,10 +6673,8 @@
             </a:pPr>
             <a:r>
               <a:rPr sz="1700">
-                <a:solidFill>
-                  <a:srgbClr val="0B3D2E"/>
-                </a:solidFill>
-                <a:latin typeface="Calibri"/>
+                <a:solidFill>val="004A38"/&gt;</a:solidFill>
+                <a:latin typeface="Poppins"/>
               </a:rPr>
               <a:t>▪  They save time, reduce costs and improve quality.</a:t>
             </a:r>
@@ -6545,10 +6687,8 @@
             </a:pPr>
             <a:r>
               <a:rPr sz="1700">
-                <a:solidFill>
-                  <a:srgbClr val="0B3D2E"/>
-                </a:solidFill>
-                <a:latin typeface="Calibri"/>
+                <a:solidFill>val="004A38"/&gt;</a:solidFill>
+                <a:latin typeface="Poppins"/>
               </a:rPr>
               <a:t>▪  Examples: online payment, telemedicine, e-government, e-learning.</a:t>
             </a:r>
@@ -6579,6 +6719,47 @@
           </a:prstGeom>
         </p:spPr>
       </p:pic>
+      <p:sp>
+        <p:nvSpPr>
+          <p:cNvPr id="990001" name="Pied de page FLE"/>
+          <p:cNvSpPr>
+            <a:spLocks noGrp="1"/>
+          </p:cNvSpPr>
+          <p:nvPr/>
+        </p:nvSpPr>
+        <p:spPr>
+          <a:xfrm>
+            <a:off x="4343400" y="-329184"/>
+            <a:ext cx="4572000" cy="274320"/>
+          </a:xfrm>
+          <a:prstGeom prst="rect">
+            <a:avLst/>
+          </a:prstGeom>
+        </p:spPr>
+        <p:txBody>
+          <a:bodyPr anchor="b"/>
+          <a:lstStyle/>
+          <a:p>
+            <a:pPr algn="r">
+              <a:defRPr sz="900">
+                <a:solidFill>
+                  <a:srgbClr val="9AA7B6"/>
+                </a:solidFill>
+                <a:latin typeface="Poppins"/>
+              </a:defRPr>
+            </a:pPr>
+            <a:r>
+              <a:rPr lang="fr-FR" sz="900">
+                <a:solidFill>
+                  <a:srgbClr val="9AA7B6"/>
+                </a:solidFill>
+                <a:latin typeface="Poppins"/>
+              </a:rPr>
+              <a:t>Université de Mostaganem — Dr. Madani BELACEL</a:t>
+            </a:r>
+          </a:p>
+        </p:txBody>
+      </p:sp>
     </p:spTree>
   </p:cSld>
   <p:clrMapOvr>
@@ -6592,9 +6773,7 @@
   <p:cSld>
     <p:bg>
       <p:bgPr>
-        <a:solidFill>
-          <a:srgbClr val="0B3D2E"/>
-        </a:solidFill>
+        <a:solidFill>val="004A38"/&gt;</a:solidFill>
         <a:effectLst/>
       </p:bgPr>
     </p:bg>
@@ -6619,9 +6798,7 @@
           <a:prstGeom prst="rect">
             <a:avLst/>
           </a:prstGeom>
-          <a:solidFill>
-            <a:srgbClr val="146B4A"/>
-          </a:solidFill>
+          <a:solidFill>val="007A55"/&gt;</a:solidFill>
           <a:ln>
             <a:noFill/>
           </a:ln>
@@ -6663,9 +6840,7 @@
           <a:prstGeom prst="rect">
             <a:avLst/>
           </a:prstGeom>
-          <a:solidFill>
-            <a:srgbClr val="FFD700"/>
-          </a:solidFill>
+          <a:solidFill>val="F0B429"/&gt;</a:solidFill>
           <a:ln>
             <a:noFill/>
           </a:ln>
@@ -6707,9 +6882,7 @@
           <a:prstGeom prst="rect">
             <a:avLst/>
           </a:prstGeom>
-          <a:solidFill>
-            <a:srgbClr val="FFD700"/>
-          </a:solidFill>
+          <a:solidFill>val="F0B429"/&gt;</a:solidFill>
           <a:ln>
             <a:noFill/>
           </a:ln>
@@ -6751,9 +6924,7 @@
           <a:prstGeom prst="rect">
             <a:avLst/>
           </a:prstGeom>
-          <a:solidFill>
-            <a:srgbClr val="146B4A"/>
-          </a:solidFill>
+          <a:solidFill>val="007A55"/&gt;</a:solidFill>
           <a:ln>
             <a:noFill/>
           </a:ln>
@@ -6806,10 +6977,8 @@
             <a:pPr algn="l"/>
             <a:r>
               <a:rPr sz="2600" b="1" i="0">
-                <a:solidFill>
-                  <a:srgbClr val="FFD700"/>
-                </a:solidFill>
-                <a:latin typeface="Calibri"/>
+                <a:solidFill>val="F0B429"/&gt;</a:solidFill>
+                <a:latin typeface="Poppins"/>
               </a:rPr>
               <a:t>Self-Assessment (MCQ)</a:t>
             </a:r>
@@ -6830,9 +6999,7 @@
           <a:prstGeom prst="rect">
             <a:avLst/>
           </a:prstGeom>
-          <a:solidFill>
-            <a:srgbClr val="146B4A"/>
-          </a:solidFill>
+          <a:solidFill>val="007A55"/&gt;</a:solidFill>
           <a:ln>
             <a:noFill/>
           </a:ln>
@@ -6889,10 +7056,8 @@
             </a:pPr>
             <a:r>
               <a:rPr sz="1500" b="1">
-                <a:solidFill>
-                  <a:srgbClr val="FFFFFF"/>
-                </a:solidFill>
-                <a:latin typeface="Calibri"/>
+                <a:solidFill>val="FFFFFF"/&gt;</a:solidFill>
+                <a:latin typeface="Poppins"/>
               </a:rPr>
               <a:t>1. What does ICT stand for?</a:t>
             </a:r>
@@ -6905,10 +7070,8 @@
             </a:pPr>
             <a:r>
               <a:rPr sz="1400">
-                <a:solidFill>
-                  <a:srgbClr val="BBBBBB"/>
-                </a:solidFill>
-                <a:latin typeface="Calibri"/>
+                <a:solidFill>val="9AA7B6"/&gt;</a:solidFill>
+                <a:latin typeface="Poppins"/>
               </a:rPr>
               <a:t>      a) Industrial and Commercial Techniques</a:t>
             </a:r>
@@ -6921,10 +7084,8 @@
             </a:pPr>
             <a:r>
               <a:rPr sz="1400">
-                <a:solidFill>
-                  <a:srgbClr val="BBBBBB"/>
-                </a:solidFill>
-                <a:latin typeface="Calibri"/>
+                <a:solidFill>val="9AA7B6"/&gt;</a:solidFill>
+                <a:latin typeface="Poppins"/>
               </a:rPr>
               <a:t>      b) Information and Communication Technology</a:t>
             </a:r>
@@ -6937,10 +7098,8 @@
             </a:pPr>
             <a:r>
               <a:rPr sz="1400">
-                <a:solidFill>
-                  <a:srgbClr val="BBBBBB"/>
-                </a:solidFill>
-                <a:latin typeface="Calibri"/>
+                <a:solidFill>val="9AA7B6"/&gt;</a:solidFill>
+                <a:latin typeface="Poppins"/>
               </a:rPr>
               <a:t>      c) Computer Processing of Calculations</a:t>
             </a:r>
@@ -6953,10 +7112,8 @@
             </a:pPr>
             <a:r>
               <a:rPr sz="1500" b="1">
-                <a:solidFill>
-                  <a:srgbClr val="FFFFFF"/>
-                </a:solidFill>
-                <a:latin typeface="Calibri"/>
+                <a:solidFill>val="FFFFFF"/&gt;</a:solidFill>
+                <a:latin typeface="Poppins"/>
               </a:rPr>
               <a:t>2. Which event marked the birth of the Internet?</a:t>
             </a:r>
@@ -6969,10 +7126,8 @@
             </a:pPr>
             <a:r>
               <a:rPr sz="1400">
-                <a:solidFill>
-                  <a:srgbClr val="BBBBBB"/>
-                </a:solidFill>
-                <a:latin typeface="Calibri"/>
+                <a:solidFill>val="9AA7B6"/&gt;</a:solidFill>
+                <a:latin typeface="Poppins"/>
               </a:rPr>
               <a:t>      a) The invention of the transistor</a:t>
             </a:r>
@@ -6985,10 +7140,8 @@
             </a:pPr>
             <a:r>
               <a:rPr sz="1400">
-                <a:solidFill>
-                  <a:srgbClr val="BBBBBB"/>
-                </a:solidFill>
-                <a:latin typeface="Calibri"/>
+                <a:solidFill>val="9AA7B6"/&gt;</a:solidFill>
+                <a:latin typeface="Poppins"/>
               </a:rPr>
               <a:t>      b) The creation of ARPANET in 1969</a:t>
             </a:r>
@@ -7001,10 +7154,8 @@
             </a:pPr>
             <a:r>
               <a:rPr sz="1400">
-                <a:solidFill>
-                  <a:srgbClr val="BBBBBB"/>
-                </a:solidFill>
-                <a:latin typeface="Calibri"/>
+                <a:solidFill>val="9AA7B6"/&gt;</a:solidFill>
+                <a:latin typeface="Poppins"/>
               </a:rPr>
               <a:t>      c) The appearance of the Web in 1990</a:t>
             </a:r>
@@ -7017,10 +7168,8 @@
             </a:pPr>
             <a:r>
               <a:rPr sz="1500" b="1">
-                <a:solidFill>
-                  <a:srgbClr val="FFFFFF"/>
-                </a:solidFill>
-                <a:latin typeface="Calibri"/>
+                <a:solidFill>val="FFFFFF"/&gt;</a:solidFill>
+                <a:latin typeface="Poppins"/>
               </a:rPr>
               <a:t>3. A byte contains:</a:t>
             </a:r>
@@ -7033,10 +7182,8 @@
             </a:pPr>
             <a:r>
               <a:rPr sz="1400">
-                <a:solidFill>
-                  <a:srgbClr val="BBBBBB"/>
-                </a:solidFill>
-                <a:latin typeface="Calibri"/>
+                <a:solidFill>val="9AA7B6"/&gt;</a:solidFill>
+                <a:latin typeface="Poppins"/>
               </a:rPr>
               <a:t>      a) 4 bits</a:t>
             </a:r>
@@ -7049,10 +7196,8 @@
             </a:pPr>
             <a:r>
               <a:rPr sz="1400">
-                <a:solidFill>
-                  <a:srgbClr val="BBBBBB"/>
-                </a:solidFill>
-                <a:latin typeface="Calibri"/>
+                <a:solidFill>val="9AA7B6"/&gt;</a:solidFill>
+                <a:latin typeface="Poppins"/>
               </a:rPr>
               <a:t>      b) 8 bits</a:t>
             </a:r>
@@ -7065,10 +7210,8 @@
             </a:pPr>
             <a:r>
               <a:rPr sz="1400">
-                <a:solidFill>
-                  <a:srgbClr val="BBBBBB"/>
-                </a:solidFill>
-                <a:latin typeface="Calibri"/>
+                <a:solidFill>val="9AA7B6"/&gt;</a:solidFill>
+                <a:latin typeface="Poppins"/>
               </a:rPr>
               <a:t>      c) 16 bits</a:t>
             </a:r>
@@ -7099,6 +7242,47 @@
           </a:prstGeom>
         </p:spPr>
       </p:pic>
+      <p:sp>
+        <p:nvSpPr>
+          <p:cNvPr id="990001" name="Pied de page FLE"/>
+          <p:cNvSpPr>
+            <a:spLocks noGrp="1"/>
+          </p:cNvSpPr>
+          <p:nvPr/>
+        </p:nvSpPr>
+        <p:spPr>
+          <a:xfrm>
+            <a:off x="4343400" y="-329184"/>
+            <a:ext cx="4572000" cy="274320"/>
+          </a:xfrm>
+          <a:prstGeom prst="rect">
+            <a:avLst/>
+          </a:prstGeom>
+        </p:spPr>
+        <p:txBody>
+          <a:bodyPr anchor="b"/>
+          <a:lstStyle/>
+          <a:p>
+            <a:pPr algn="r">
+              <a:defRPr sz="900">
+                <a:solidFill>
+                  <a:srgbClr val="9AA7B6"/>
+                </a:solidFill>
+                <a:latin typeface="Poppins"/>
+              </a:defRPr>
+            </a:pPr>
+            <a:r>
+              <a:rPr lang="fr-FR" sz="900">
+                <a:solidFill>
+                  <a:srgbClr val="9AA7B6"/>
+                </a:solidFill>
+                <a:latin typeface="Poppins"/>
+              </a:rPr>
+              <a:t>Université de Mostaganem — Dr. Madani BELACEL</a:t>
+            </a:r>
+          </a:p>
+        </p:txBody>
+      </p:sp>
     </p:spTree>
   </p:cSld>
   <p:clrMapOvr>
@@ -7112,9 +7296,7 @@
   <p:cSld>
     <p:bg>
       <p:bgPr>
-        <a:solidFill>
-          <a:srgbClr val="0B3D2E"/>
-        </a:solidFill>
+        <a:solidFill>val="004A38"/&gt;</a:solidFill>
         <a:effectLst/>
       </p:bgPr>
     </p:bg>
@@ -7139,9 +7321,7 @@
           <a:prstGeom prst="rect">
             <a:avLst/>
           </a:prstGeom>
-          <a:solidFill>
-            <a:srgbClr val="146B4A"/>
-          </a:solidFill>
+          <a:solidFill>val="007A55"/&gt;</a:solidFill>
           <a:ln>
             <a:noFill/>
           </a:ln>
@@ -7183,9 +7363,7 @@
           <a:prstGeom prst="rect">
             <a:avLst/>
           </a:prstGeom>
-          <a:solidFill>
-            <a:srgbClr val="FFD700"/>
-          </a:solidFill>
+          <a:solidFill>val="F0B429"/&gt;</a:solidFill>
           <a:ln>
             <a:noFill/>
           </a:ln>
@@ -7227,9 +7405,7 @@
           <a:prstGeom prst="rect">
             <a:avLst/>
           </a:prstGeom>
-          <a:solidFill>
-            <a:srgbClr val="FFD700"/>
-          </a:solidFill>
+          <a:solidFill>val="F0B429"/&gt;</a:solidFill>
           <a:ln>
             <a:noFill/>
           </a:ln>
@@ -7271,9 +7447,7 @@
           <a:prstGeom prst="rect">
             <a:avLst/>
           </a:prstGeom>
-          <a:solidFill>
-            <a:srgbClr val="146B4A"/>
-          </a:solidFill>
+          <a:solidFill>val="007A55"/&gt;</a:solidFill>
           <a:ln>
             <a:noFill/>
           </a:ln>
@@ -7326,10 +7500,8 @@
             <a:pPr algn="ctr"/>
             <a:r>
               <a:rPr sz="3000" b="1" i="0">
-                <a:solidFill>
-                  <a:srgbClr val="FFD700"/>
-                </a:solidFill>
-                <a:latin typeface="Calibri"/>
+                <a:solidFill>val="F0B429"/&gt;</a:solidFill>
+                <a:latin typeface="Poppins"/>
               </a:rPr>
               <a:t>Conclusion</a:t>
             </a:r>
@@ -7350,9 +7522,7 @@
           <a:prstGeom prst="rect">
             <a:avLst/>
           </a:prstGeom>
-          <a:solidFill>
-            <a:srgbClr val="146B4A"/>
-          </a:solidFill>
+          <a:solidFill>val="007A55"/&gt;</a:solidFill>
           <a:ln>
             <a:noFill/>
           </a:ln>
@@ -7409,10 +7579,8 @@
             </a:pPr>
             <a:r>
               <a:rPr sz="1800">
-                <a:solidFill>
-                  <a:srgbClr val="FFFFFF"/>
-                </a:solidFill>
-                <a:latin typeface="Calibri"/>
+                <a:solidFill>val="FFFFFF"/&gt;</a:solidFill>
+                <a:latin typeface="Poppins"/>
               </a:rPr>
               <a:t>▪  ICT combines computing, networks and telecommunications.</a:t>
             </a:r>
@@ -7425,10 +7593,8 @@
             </a:pPr>
             <a:r>
               <a:rPr sz="1800">
-                <a:solidFill>
-                  <a:srgbClr val="FFFFFF"/>
-                </a:solidFill>
-                <a:latin typeface="Calibri"/>
+                <a:solidFill>val="FFFFFF"/&gt;</a:solidFill>
+                <a:latin typeface="Poppins"/>
               </a:rPr>
               <a:t>▪  They have deeply transformed society, work and education.</a:t>
             </a:r>
@@ -7441,10 +7607,8 @@
             </a:pPr>
             <a:r>
               <a:rPr sz="1800">
-                <a:solidFill>
-                  <a:srgbClr val="FFFFFF"/>
-                </a:solidFill>
-                <a:latin typeface="Calibri"/>
+                <a:solidFill>val="FFFFFF"/&gt;</a:solidFill>
+                <a:latin typeface="Poppins"/>
               </a:rPr>
               <a:t>▪  Understanding their foundations is the first step toward mastering digital technology.</a:t>
             </a:r>
@@ -7457,10 +7621,8 @@
             </a:pPr>
             <a:r>
               <a:rPr sz="1800">
-                <a:solidFill>
-                  <a:srgbClr val="FFFFFF"/>
-                </a:solidFill>
-                <a:latin typeface="Calibri"/>
+                <a:solidFill>val="FFFFFF"/&gt;</a:solidFill>
+                <a:latin typeface="Poppins"/>
               </a:rPr>
               <a:t>▪  Next course: the computer and its components.</a:t>
             </a:r>
@@ -7491,6 +7653,47 @@
           </a:prstGeom>
         </p:spPr>
       </p:pic>
+      <p:sp>
+        <p:nvSpPr>
+          <p:cNvPr id="990001" name="Pied de page FLE"/>
+          <p:cNvSpPr>
+            <a:spLocks noGrp="1"/>
+          </p:cNvSpPr>
+          <p:nvPr/>
+        </p:nvSpPr>
+        <p:spPr>
+          <a:xfrm>
+            <a:off x="4343400" y="-329184"/>
+            <a:ext cx="4572000" cy="274320"/>
+          </a:xfrm>
+          <a:prstGeom prst="rect">
+            <a:avLst/>
+          </a:prstGeom>
+        </p:spPr>
+        <p:txBody>
+          <a:bodyPr anchor="b"/>
+          <a:lstStyle/>
+          <a:p>
+            <a:pPr algn="r">
+              <a:defRPr sz="900">
+                <a:solidFill>
+                  <a:srgbClr val="9AA7B6"/>
+                </a:solidFill>
+                <a:latin typeface="Poppins"/>
+              </a:defRPr>
+            </a:pPr>
+            <a:r>
+              <a:rPr lang="fr-FR" sz="900">
+                <a:solidFill>
+                  <a:srgbClr val="9AA7B6"/>
+                </a:solidFill>
+                <a:latin typeface="Poppins"/>
+              </a:rPr>
+              <a:t>Université de Mostaganem — Dr. Madani BELACEL</a:t>
+            </a:r>
+          </a:p>
+        </p:txBody>
+      </p:sp>
     </p:spTree>
   </p:cSld>
   <p:clrMapOvr>
@@ -7504,9 +7707,7 @@
   <p:cSld>
     <p:bg>
       <p:bgPr>
-        <a:solidFill>
-          <a:srgbClr val="0B3D2E"/>
-        </a:solidFill>
+        <a:solidFill>val="004A38"/&gt;</a:solidFill>
         <a:effectLst/>
       </p:bgPr>
     </p:bg>
@@ -7531,9 +7732,7 @@
           <a:prstGeom prst="rect">
             <a:avLst/>
           </a:prstGeom>
-          <a:solidFill>
-            <a:srgbClr val="146B4A"/>
-          </a:solidFill>
+          <a:solidFill>val="007A55"/&gt;</a:solidFill>
           <a:ln>
             <a:noFill/>
           </a:ln>
@@ -7575,9 +7774,7 @@
           <a:prstGeom prst="rect">
             <a:avLst/>
           </a:prstGeom>
-          <a:solidFill>
-            <a:srgbClr val="FFD700"/>
-          </a:solidFill>
+          <a:solidFill>val="F0B429"/&gt;</a:solidFill>
           <a:ln>
             <a:noFill/>
           </a:ln>
@@ -7619,9 +7816,7 @@
           <a:prstGeom prst="rect">
             <a:avLst/>
           </a:prstGeom>
-          <a:solidFill>
-            <a:srgbClr val="FFD700"/>
-          </a:solidFill>
+          <a:solidFill>val="F0B429"/&gt;</a:solidFill>
           <a:ln>
             <a:noFill/>
           </a:ln>
@@ -7663,9 +7858,7 @@
           <a:prstGeom prst="rect">
             <a:avLst/>
           </a:prstGeom>
-          <a:solidFill>
-            <a:srgbClr val="146B4A"/>
-          </a:solidFill>
+          <a:solidFill>val="007A55"/&gt;</a:solidFill>
           <a:ln>
             <a:noFill/>
           </a:ln>
@@ -7718,10 +7911,8 @@
             <a:pPr algn="ctr"/>
             <a:r>
               <a:rPr sz="3200" b="1" i="0">
-                <a:solidFill>
-                  <a:srgbClr val="FFD700"/>
-                </a:solidFill>
-                <a:latin typeface="Calibri"/>
+                <a:solidFill>val="F0B429"/&gt;</a:solidFill>
+                <a:latin typeface="Poppins"/>
               </a:rPr>
               <a:t>Course Outline</a:t>
             </a:r>
@@ -7757,10 +7948,8 @@
             </a:pPr>
             <a:r>
               <a:rPr sz="1900">
-                <a:solidFill>
-                  <a:srgbClr val="FFFFFF"/>
-                </a:solidFill>
-                <a:latin typeface="Calibri"/>
+                <a:solidFill>val="FFFFFF"/&gt;</a:solidFill>
+                <a:latin typeface="Poppins"/>
               </a:rPr>
               <a:t>▪  1. Definition of ICT</a:t>
             </a:r>
@@ -7773,10 +7962,8 @@
             </a:pPr>
             <a:r>
               <a:rPr sz="1900">
-                <a:solidFill>
-                  <a:srgbClr val="FFFFFF"/>
-                </a:solidFill>
-                <a:latin typeface="Calibri"/>
+                <a:solidFill>val="FFFFFF"/&gt;</a:solidFill>
+                <a:latin typeface="Poppins"/>
               </a:rPr>
               <a:t>▪  2. History and Evolution</a:t>
             </a:r>
@@ -7789,10 +7976,8 @@
             </a:pPr>
             <a:r>
               <a:rPr sz="1900">
-                <a:solidFill>
-                  <a:srgbClr val="FFFFFF"/>
-                </a:solidFill>
-                <a:latin typeface="Calibri"/>
+                <a:solidFill>val="FFFFFF"/&gt;</a:solidFill>
+                <a:latin typeface="Poppins"/>
               </a:rPr>
               <a:t>▪  3. Components of ICT</a:t>
             </a:r>
@@ -7805,10 +7990,8 @@
             </a:pPr>
             <a:r>
               <a:rPr sz="1900">
-                <a:solidFill>
-                  <a:srgbClr val="FFFFFF"/>
-                </a:solidFill>
-                <a:latin typeface="Calibri"/>
+                <a:solidFill>val="FFFFFF"/&gt;</a:solidFill>
+                <a:latin typeface="Poppins"/>
               </a:rPr>
               <a:t>▪  4. Impact of ICT on Society</a:t>
             </a:r>
@@ -7821,10 +8004,8 @@
             </a:pPr>
             <a:r>
               <a:rPr sz="1900">
-                <a:solidFill>
-                  <a:srgbClr val="FFFFFF"/>
-                </a:solidFill>
-                <a:latin typeface="Calibri"/>
+                <a:solidFill>val="FFFFFF"/&gt;</a:solidFill>
+                <a:latin typeface="Poppins"/>
               </a:rPr>
               <a:t>▪  5. ICT in Education</a:t>
             </a:r>
@@ -7837,10 +8018,8 @@
             </a:pPr>
             <a:r>
               <a:rPr sz="1900">
-                <a:solidFill>
-                  <a:srgbClr val="FFFFFF"/>
-                </a:solidFill>
-                <a:latin typeface="Calibri"/>
+                <a:solidFill>val="FFFFFF"/&gt;</a:solidFill>
+                <a:latin typeface="Poppins"/>
               </a:rPr>
               <a:t>▪  6. Digital Basics: Key Concepts</a:t>
             </a:r>
@@ -7853,12 +8032,51 @@
             </a:pPr>
             <a:r>
               <a:rPr sz="1900">
-                <a:solidFill>
-                  <a:srgbClr val="FFFFFF"/>
-                </a:solidFill>
-                <a:latin typeface="Calibri"/>
+                <a:solidFill>val="FFFFFF"/&gt;</a:solidFill>
+                <a:latin typeface="Poppins"/>
               </a:rPr>
               <a:t>▪  7. Outlook and Trends</a:t>
+            </a:r>
+          </a:p>
+        </p:txBody>
+      </p:sp>
+      <p:sp>
+        <p:nvSpPr>
+          <p:cNvPr id="990001" name="Pied de page FLE"/>
+          <p:cNvSpPr>
+            <a:spLocks noGrp="1"/>
+          </p:cNvSpPr>
+          <p:nvPr/>
+        </p:nvSpPr>
+        <p:spPr>
+          <a:xfrm>
+            <a:off x="4343400" y="-329184"/>
+            <a:ext cx="4572000" cy="274320"/>
+          </a:xfrm>
+          <a:prstGeom prst="rect">
+            <a:avLst/>
+          </a:prstGeom>
+        </p:spPr>
+        <p:txBody>
+          <a:bodyPr anchor="b"/>
+          <a:lstStyle/>
+          <a:p>
+            <a:pPr algn="r">
+              <a:defRPr sz="900">
+                <a:solidFill>
+                  <a:srgbClr val="9AA7B6"/>
+                </a:solidFill>
+                <a:latin typeface="Poppins"/>
+              </a:defRPr>
+            </a:pPr>
+            <a:r>
+              <a:rPr lang="fr-FR" sz="900">
+                <a:solidFill>
+                  <a:srgbClr val="9AA7B6"/>
+                </a:solidFill>
+                <a:latin typeface="Poppins"/>
+              </a:rPr>
+              <a:t>Université de Mostaganem — Dr. Madani BELACEL</a:t>
             </a:r>
           </a:p>
         </p:txBody>
@@ -7876,9 +8094,7 @@
   <p:cSld>
     <p:bg>
       <p:bgPr>
-        <a:solidFill>
-          <a:srgbClr val="0B3D2E"/>
-        </a:solidFill>
+        <a:solidFill>val="004A38"/&gt;</a:solidFill>
         <a:effectLst/>
       </p:bgPr>
     </p:bg>
@@ -7903,9 +8119,7 @@
           <a:prstGeom prst="rect">
             <a:avLst/>
           </a:prstGeom>
-          <a:solidFill>
-            <a:srgbClr val="146B4A"/>
-          </a:solidFill>
+          <a:solidFill>val="007A55"/&gt;</a:solidFill>
           <a:ln>
             <a:noFill/>
           </a:ln>
@@ -7947,9 +8161,7 @@
           <a:prstGeom prst="rect">
             <a:avLst/>
           </a:prstGeom>
-          <a:solidFill>
-            <a:srgbClr val="FFD700"/>
-          </a:solidFill>
+          <a:solidFill>val="F0B429"/&gt;</a:solidFill>
           <a:ln>
             <a:noFill/>
           </a:ln>
@@ -7991,9 +8203,7 @@
           <a:prstGeom prst="rect">
             <a:avLst/>
           </a:prstGeom>
-          <a:solidFill>
-            <a:srgbClr val="FFD700"/>
-          </a:solidFill>
+          <a:solidFill>val="F0B429"/&gt;</a:solidFill>
           <a:ln>
             <a:noFill/>
           </a:ln>
@@ -8035,9 +8245,7 @@
           <a:prstGeom prst="rect">
             <a:avLst/>
           </a:prstGeom>
-          <a:solidFill>
-            <a:srgbClr val="146B4A"/>
-          </a:solidFill>
+          <a:solidFill>val="007A55"/&gt;</a:solidFill>
           <a:ln>
             <a:noFill/>
           </a:ln>
@@ -8090,10 +8298,8 @@
             <a:pPr algn="l"/>
             <a:r>
               <a:rPr sz="3000" b="1" i="0">
-                <a:solidFill>
-                  <a:srgbClr val="FFD700"/>
-                </a:solidFill>
-                <a:latin typeface="Calibri"/>
+                <a:solidFill>val="F0B429"/&gt;</a:solidFill>
+                <a:latin typeface="Poppins"/>
               </a:rPr>
               <a:t>References</a:t>
             </a:r>
@@ -8114,9 +8320,7 @@
           <a:prstGeom prst="rect">
             <a:avLst/>
           </a:prstGeom>
-          <a:solidFill>
-            <a:srgbClr val="146B4A"/>
-          </a:solidFill>
+          <a:solidFill>val="007A55"/&gt;</a:solidFill>
           <a:ln>
             <a:noFill/>
           </a:ln>
@@ -8173,10 +8377,8 @@
             </a:pPr>
             <a:r>
               <a:rPr sz="1500">
-                <a:solidFill>
-                  <a:srgbClr val="BBBBBB"/>
-                </a:solidFill>
-                <a:latin typeface="Calibri"/>
+                <a:solidFill>val="9AA7B6"/&gt;</a:solidFill>
+                <a:latin typeface="Poppins"/>
               </a:rPr>
               <a:t>- C. Balpe et al., "Initiation to Computing", Ellipses.</a:t>
             </a:r>
@@ -8189,10 +8391,8 @@
             </a:pPr>
             <a:r>
               <a:rPr sz="1500">
-                <a:solidFill>
-                  <a:srgbClr val="BBBBBB"/>
-                </a:solidFill>
-                <a:latin typeface="Calibri"/>
+                <a:solidFill>val="9AA7B6"/&gt;</a:solidFill>
+                <a:latin typeface="Poppins"/>
               </a:rPr>
               <a:t>- J. Baudouin, "Introduction to Information Sciences", Armand Colin.</a:t>
             </a:r>
@@ -8205,10 +8405,8 @@
             </a:pPr>
             <a:r>
               <a:rPr sz="1500">
-                <a:solidFill>
-                  <a:srgbClr val="BBBBBB"/>
-                </a:solidFill>
-                <a:latin typeface="Calibri"/>
+                <a:solidFill>val="9AA7B6"/&gt;</a:solidFill>
+                <a:latin typeface="Poppins"/>
               </a:rPr>
               <a:t>- ICT Course materials, CS Department, University of Mostaganem.</a:t>
             </a:r>
@@ -8221,10 +8419,8 @@
             </a:pPr>
             <a:r>
               <a:rPr sz="1500">
-                <a:solidFill>
-                  <a:srgbClr val="BBBBBB"/>
-                </a:solidFill>
-                <a:latin typeface="Calibri"/>
+                <a:solidFill>val="9AA7B6"/&gt;</a:solidFill>
+                <a:latin typeface="Poppins"/>
               </a:rPr>
               <a:t>- Official sites: www.education.dz, www.w3schools.com.</a:t>
             </a:r>
@@ -8255,6 +8451,47 @@
           </a:prstGeom>
         </p:spPr>
       </p:pic>
+      <p:sp>
+        <p:nvSpPr>
+          <p:cNvPr id="990001" name="Pied de page FLE"/>
+          <p:cNvSpPr>
+            <a:spLocks noGrp="1"/>
+          </p:cNvSpPr>
+          <p:nvPr/>
+        </p:nvSpPr>
+        <p:spPr>
+          <a:xfrm>
+            <a:off x="4343400" y="-329184"/>
+            <a:ext cx="4572000" cy="274320"/>
+          </a:xfrm>
+          <a:prstGeom prst="rect">
+            <a:avLst/>
+          </a:prstGeom>
+        </p:spPr>
+        <p:txBody>
+          <a:bodyPr anchor="b"/>
+          <a:lstStyle/>
+          <a:p>
+            <a:pPr algn="r">
+              <a:defRPr sz="900">
+                <a:solidFill>
+                  <a:srgbClr val="9AA7B6"/>
+                </a:solidFill>
+                <a:latin typeface="Poppins"/>
+              </a:defRPr>
+            </a:pPr>
+            <a:r>
+              <a:rPr lang="fr-FR" sz="900">
+                <a:solidFill>
+                  <a:srgbClr val="9AA7B6"/>
+                </a:solidFill>
+                <a:latin typeface="Poppins"/>
+              </a:rPr>
+              <a:t>Université de Mostaganem — Dr. Madani BELACEL</a:t>
+            </a:r>
+          </a:p>
+        </p:txBody>
+      </p:sp>
     </p:spTree>
   </p:cSld>
   <p:clrMapOvr>
@@ -8268,9 +8505,7 @@
   <p:cSld>
     <p:bg>
       <p:bgPr>
-        <a:solidFill>
-          <a:srgbClr val="0B3D2E"/>
-        </a:solidFill>
+        <a:solidFill>val="004A38"/&gt;</a:solidFill>
         <a:effectLst/>
       </p:bgPr>
     </p:bg>
@@ -8295,9 +8530,7 @@
           <a:prstGeom prst="rect">
             <a:avLst/>
           </a:prstGeom>
-          <a:solidFill>
-            <a:srgbClr val="146B4A"/>
-          </a:solidFill>
+          <a:solidFill>val="007A55"/&gt;</a:solidFill>
           <a:ln>
             <a:noFill/>
           </a:ln>
@@ -8339,9 +8572,7 @@
           <a:prstGeom prst="rect">
             <a:avLst/>
           </a:prstGeom>
-          <a:solidFill>
-            <a:srgbClr val="FFD700"/>
-          </a:solidFill>
+          <a:solidFill>val="F0B429"/&gt;</a:solidFill>
           <a:ln>
             <a:noFill/>
           </a:ln>
@@ -8383,9 +8614,7 @@
           <a:prstGeom prst="rect">
             <a:avLst/>
           </a:prstGeom>
-          <a:solidFill>
-            <a:srgbClr val="FFD700"/>
-          </a:solidFill>
+          <a:solidFill>val="F0B429"/&gt;</a:solidFill>
           <a:ln>
             <a:noFill/>
           </a:ln>
@@ -8427,9 +8656,7 @@
           <a:prstGeom prst="rect">
             <a:avLst/>
           </a:prstGeom>
-          <a:solidFill>
-            <a:srgbClr val="146B4A"/>
-          </a:solidFill>
+          <a:solidFill>val="007A55"/&gt;</a:solidFill>
           <a:ln>
             <a:noFill/>
           </a:ln>
@@ -8471,9 +8698,7 @@
           <a:prstGeom prst="rect">
             <a:avLst/>
           </a:prstGeom>
-          <a:solidFill>
-            <a:srgbClr val="FFD700"/>
-          </a:solidFill>
+          <a:solidFill>val="F0B429"/&gt;</a:solidFill>
           <a:ln>
             <a:noFill/>
           </a:ln>
@@ -8526,10 +8751,8 @@
             <a:pPr algn="ctr"/>
             <a:r>
               <a:rPr sz="3800" b="1" i="0">
-                <a:solidFill>
-                  <a:srgbClr val="FFD700"/>
-                </a:solidFill>
-                <a:latin typeface="Calibri"/>
+                <a:solidFill>val="F0B429"/&gt;</a:solidFill>
+                <a:latin typeface="Poppins"/>
               </a:rPr>
               <a:t>Thank you for your attention!</a:t>
             </a:r>
@@ -8561,10 +8784,8 @@
             <a:pPr algn="ctr"/>
             <a:r>
               <a:rPr sz="2600" b="0" i="0">
-                <a:solidFill>
-                  <a:srgbClr val="FFFFFF"/>
-                </a:solidFill>
-                <a:latin typeface="Calibri"/>
+                <a:solidFill>val="FFFFFF"/&gt;</a:solidFill>
+                <a:latin typeface="Poppins"/>
               </a:rPr>
               <a:t>Questions?</a:t>
             </a:r>
@@ -8596,10 +8817,8 @@
             <a:pPr algn="ctr"/>
             <a:r>
               <a:rPr sz="1600" b="0" i="0">
-                <a:solidFill>
-                  <a:srgbClr val="BBBBBB"/>
-                </a:solidFill>
-                <a:latin typeface="Calibri"/>
+                <a:solidFill>val="9AA7B6"/&gt;</a:solidFill>
+                <a:latin typeface="Poppins"/>
               </a:rPr>
               <a:t>Dr. BELACEL Madani</a:t>
             </a:r>
@@ -8630,6 +8849,47 @@
           </a:prstGeom>
         </p:spPr>
       </p:pic>
+      <p:sp>
+        <p:nvSpPr>
+          <p:cNvPr id="990001" name="Pied de page FLE"/>
+          <p:cNvSpPr>
+            <a:spLocks noGrp="1"/>
+          </p:cNvSpPr>
+          <p:nvPr/>
+        </p:nvSpPr>
+        <p:spPr>
+          <a:xfrm>
+            <a:off x="4343400" y="-329184"/>
+            <a:ext cx="4572000" cy="274320"/>
+          </a:xfrm>
+          <a:prstGeom prst="rect">
+            <a:avLst/>
+          </a:prstGeom>
+        </p:spPr>
+        <p:txBody>
+          <a:bodyPr anchor="b"/>
+          <a:lstStyle/>
+          <a:p>
+            <a:pPr algn="r">
+              <a:defRPr sz="900">
+                <a:solidFill>
+                  <a:srgbClr val="9AA7B6"/>
+                </a:solidFill>
+                <a:latin typeface="Poppins"/>
+              </a:defRPr>
+            </a:pPr>
+            <a:r>
+              <a:rPr lang="fr-FR" sz="900">
+                <a:solidFill>
+                  <a:srgbClr val="9AA7B6"/>
+                </a:solidFill>
+                <a:latin typeface="Poppins"/>
+              </a:rPr>
+              <a:t>Université de Mostaganem — Dr. Madani BELACEL</a:t>
+            </a:r>
+          </a:p>
+        </p:txBody>
+      </p:sp>
     </p:spTree>
   </p:cSld>
   <p:clrMapOvr>
@@ -8643,9 +8903,7 @@
   <p:cSld>
     <p:bg>
       <p:bgPr>
-        <a:solidFill>
-          <a:srgbClr val="0B3D2E"/>
-        </a:solidFill>
+        <a:solidFill>val="004A38"/&gt;</a:solidFill>
         <a:effectLst/>
       </p:bgPr>
     </p:bg>
@@ -8670,9 +8928,7 @@
           <a:prstGeom prst="rect">
             <a:avLst/>
           </a:prstGeom>
-          <a:solidFill>
-            <a:srgbClr val="146B4A"/>
-          </a:solidFill>
+          <a:solidFill>val="007A55"/&gt;</a:solidFill>
           <a:ln>
             <a:noFill/>
           </a:ln>
@@ -8714,9 +8970,7 @@
           <a:prstGeom prst="rect">
             <a:avLst/>
           </a:prstGeom>
-          <a:solidFill>
-            <a:srgbClr val="FFD700"/>
-          </a:solidFill>
+          <a:solidFill>val="F0B429"/&gt;</a:solidFill>
           <a:ln>
             <a:noFill/>
           </a:ln>
@@ -8758,9 +9012,7 @@
           <a:prstGeom prst="rect">
             <a:avLst/>
           </a:prstGeom>
-          <a:solidFill>
-            <a:srgbClr val="FFD700"/>
-          </a:solidFill>
+          <a:solidFill>val="F0B429"/&gt;</a:solidFill>
           <a:ln>
             <a:noFill/>
           </a:ln>
@@ -8802,9 +9054,7 @@
           <a:prstGeom prst="rect">
             <a:avLst/>
           </a:prstGeom>
-          <a:solidFill>
-            <a:srgbClr val="146B4A"/>
-          </a:solidFill>
+          <a:solidFill>val="007A55"/&gt;</a:solidFill>
           <a:ln>
             <a:noFill/>
           </a:ln>
@@ -8846,9 +9096,7 @@
           <a:prstGeom prst="rect">
             <a:avLst/>
           </a:prstGeom>
-          <a:solidFill>
-            <a:srgbClr val="146B4A"/>
-          </a:solidFill>
+          <a:solidFill>val="007A55"/&gt;</a:solidFill>
           <a:ln>
             <a:noFill/>
           </a:ln>
@@ -8901,10 +9149,8 @@
             <a:pPr algn="ctr"/>
             <a:r>
               <a:rPr sz="2200" b="1" i="0">
-                <a:solidFill>
-                  <a:srgbClr val="BBBBBB"/>
-                </a:solidFill>
-                <a:latin typeface="Calibri"/>
+                <a:solidFill>val="9AA7B6"/&gt;</a:solidFill>
+                <a:latin typeface="Poppins"/>
               </a:rPr>
               <a:t>Section 1</a:t>
             </a:r>
@@ -8936,10 +9182,8 @@
             <a:pPr algn="ctr"/>
             <a:r>
               <a:rPr sz="2800" b="1" i="0">
-                <a:solidFill>
-                  <a:srgbClr val="FFD700"/>
-                </a:solidFill>
-                <a:latin typeface="Calibri"/>
+                <a:solidFill>val="F0B429"/&gt;</a:solidFill>
+                <a:latin typeface="Poppins"/>
               </a:rPr>
               <a:t>Definition of ICT</a:t>
             </a:r>
@@ -8970,6 +9214,47 @@
           </a:prstGeom>
         </p:spPr>
       </p:pic>
+      <p:sp>
+        <p:nvSpPr>
+          <p:cNvPr id="990001" name="Pied de page FLE"/>
+          <p:cNvSpPr>
+            <a:spLocks noGrp="1"/>
+          </p:cNvSpPr>
+          <p:nvPr/>
+        </p:nvSpPr>
+        <p:spPr>
+          <a:xfrm>
+            <a:off x="4343400" y="-329184"/>
+            <a:ext cx="4572000" cy="274320"/>
+          </a:xfrm>
+          <a:prstGeom prst="rect">
+            <a:avLst/>
+          </a:prstGeom>
+        </p:spPr>
+        <p:txBody>
+          <a:bodyPr anchor="b"/>
+          <a:lstStyle/>
+          <a:p>
+            <a:pPr algn="r">
+              <a:defRPr sz="900">
+                <a:solidFill>
+                  <a:srgbClr val="9AA7B6"/>
+                </a:solidFill>
+                <a:latin typeface="Poppins"/>
+              </a:defRPr>
+            </a:pPr>
+            <a:r>
+              <a:rPr lang="fr-FR" sz="900">
+                <a:solidFill>
+                  <a:srgbClr val="9AA7B6"/>
+                </a:solidFill>
+                <a:latin typeface="Poppins"/>
+              </a:rPr>
+              <a:t>Université de Mostaganem — Dr. Madani BELACEL</a:t>
+            </a:r>
+          </a:p>
+        </p:txBody>
+      </p:sp>
     </p:spTree>
   </p:cSld>
   <p:clrMapOvr>
@@ -8983,9 +9268,7 @@
   <p:cSld>
     <p:bg>
       <p:bgPr>
-        <a:solidFill>
-          <a:srgbClr val="0B3D2E"/>
-        </a:solidFill>
+        <a:solidFill>val="004A38"/&gt;</a:solidFill>
         <a:effectLst/>
       </p:bgPr>
     </p:bg>
@@ -9010,9 +9293,7 @@
           <a:prstGeom prst="rect">
             <a:avLst/>
           </a:prstGeom>
-          <a:solidFill>
-            <a:srgbClr val="146B4A"/>
-          </a:solidFill>
+          <a:solidFill>val="007A55"/&gt;</a:solidFill>
           <a:ln>
             <a:noFill/>
           </a:ln>
@@ -9054,9 +9335,7 @@
           <a:prstGeom prst="rect">
             <a:avLst/>
           </a:prstGeom>
-          <a:solidFill>
-            <a:srgbClr val="FFD700"/>
-          </a:solidFill>
+          <a:solidFill>val="F0B429"/&gt;</a:solidFill>
           <a:ln>
             <a:noFill/>
           </a:ln>
@@ -9098,9 +9377,7 @@
           <a:prstGeom prst="rect">
             <a:avLst/>
           </a:prstGeom>
-          <a:solidFill>
-            <a:srgbClr val="FFD700"/>
-          </a:solidFill>
+          <a:solidFill>val="F0B429"/&gt;</a:solidFill>
           <a:ln>
             <a:noFill/>
           </a:ln>
@@ -9142,9 +9419,7 @@
           <a:prstGeom prst="rect">
             <a:avLst/>
           </a:prstGeom>
-          <a:solidFill>
-            <a:srgbClr val="146B4A"/>
-          </a:solidFill>
+          <a:solidFill>val="007A55"/&gt;</a:solidFill>
           <a:ln>
             <a:noFill/>
           </a:ln>
@@ -9197,10 +9472,8 @@
             <a:pPr algn="l"/>
             <a:r>
               <a:rPr sz="2400" b="1" i="0">
-                <a:solidFill>
-                  <a:srgbClr val="FFD700"/>
-                </a:solidFill>
-                <a:latin typeface="Calibri"/>
+                <a:solidFill>val="F0B429"/&gt;</a:solidFill>
+                <a:latin typeface="Poppins"/>
               </a:rPr>
               <a:t>1 - Definition of ICT</a:t>
             </a:r>
@@ -9221,9 +9494,7 @@
           <a:prstGeom prst="rect">
             <a:avLst/>
           </a:prstGeom>
-          <a:solidFill>
-            <a:srgbClr val="146B4A"/>
-          </a:solidFill>
+          <a:solidFill>val="007A55"/&gt;</a:solidFill>
           <a:ln>
             <a:noFill/>
           </a:ln>
@@ -9280,10 +9551,8 @@
             </a:pPr>
             <a:r>
               <a:rPr sz="1800">
-                <a:solidFill>
-                  <a:srgbClr val="FFFFFF"/>
-                </a:solidFill>
-                <a:latin typeface="Calibri"/>
+                <a:solidFill>val="FFFFFF"/&gt;</a:solidFill>
+                <a:latin typeface="Poppins"/>
               </a:rPr>
               <a:t>▪  ICT = the set of technologies used to process and transmit information.</a:t>
             </a:r>
@@ -9296,10 +9565,8 @@
             </a:pPr>
             <a:r>
               <a:rPr sz="1800">
-                <a:solidFill>
-                  <a:srgbClr val="FFFFFF"/>
-                </a:solidFill>
-                <a:latin typeface="Calibri"/>
+                <a:solidFill>val="FFFFFF"/&gt;</a:solidFill>
+                <a:latin typeface="Poppins"/>
               </a:rPr>
               <a:t>▪  Includes: computing, electronics, telecommunications and networks.</a:t>
             </a:r>
@@ -9312,10 +9579,8 @@
             </a:pPr>
             <a:r>
               <a:rPr sz="1800">
-                <a:solidFill>
-                  <a:srgbClr val="FFFFFF"/>
-                </a:solidFill>
-                <a:latin typeface="Calibri"/>
+                <a:solidFill>val="FFFFFF"/&gt;</a:solidFill>
+                <a:latin typeface="Poppins"/>
               </a:rPr>
               <a:t>▪  Tools: computers, smartphones, the Internet, software and applications.</a:t>
             </a:r>
@@ -9328,10 +9593,8 @@
             </a:pPr>
             <a:r>
               <a:rPr sz="1800">
-                <a:solidFill>
-                  <a:srgbClr val="FFFFFF"/>
-                </a:solidFill>
-                <a:latin typeface="Calibri"/>
+                <a:solidFill>val="FFFFFF"/&gt;</a:solidFill>
+                <a:latin typeface="Poppins"/>
               </a:rPr>
               <a:t>▪  Goal: collect, process, store and distribute information.</a:t>
             </a:r>
@@ -9362,6 +9625,47 @@
           </a:prstGeom>
         </p:spPr>
       </p:pic>
+      <p:sp>
+        <p:nvSpPr>
+          <p:cNvPr id="990001" name="Pied de page FLE"/>
+          <p:cNvSpPr>
+            <a:spLocks noGrp="1"/>
+          </p:cNvSpPr>
+          <p:nvPr/>
+        </p:nvSpPr>
+        <p:spPr>
+          <a:xfrm>
+            <a:off x="4343400" y="-329184"/>
+            <a:ext cx="4572000" cy="274320"/>
+          </a:xfrm>
+          <a:prstGeom prst="rect">
+            <a:avLst/>
+          </a:prstGeom>
+        </p:spPr>
+        <p:txBody>
+          <a:bodyPr anchor="b"/>
+          <a:lstStyle/>
+          <a:p>
+            <a:pPr algn="r">
+              <a:defRPr sz="900">
+                <a:solidFill>
+                  <a:srgbClr val="9AA7B6"/>
+                </a:solidFill>
+                <a:latin typeface="Poppins"/>
+              </a:defRPr>
+            </a:pPr>
+            <a:r>
+              <a:rPr lang="fr-FR" sz="900">
+                <a:solidFill>
+                  <a:srgbClr val="9AA7B6"/>
+                </a:solidFill>
+                <a:latin typeface="Poppins"/>
+              </a:rPr>
+              <a:t>Université de Mostaganem — Dr. Madani BELACEL</a:t>
+            </a:r>
+          </a:p>
+        </p:txBody>
+      </p:sp>
     </p:spTree>
   </p:cSld>
   <p:clrMapOvr>
@@ -9375,9 +9679,7 @@
   <p:cSld>
     <p:bg>
       <p:bgPr>
-        <a:solidFill>
-          <a:srgbClr val="0B3D2E"/>
-        </a:solidFill>
+        <a:solidFill>val="004A38"/&gt;</a:solidFill>
         <a:effectLst/>
       </p:bgPr>
     </p:bg>
@@ -9402,9 +9704,7 @@
           <a:prstGeom prst="rect">
             <a:avLst/>
           </a:prstGeom>
-          <a:solidFill>
-            <a:srgbClr val="146B4A"/>
-          </a:solidFill>
+          <a:solidFill>val="007A55"/&gt;</a:solidFill>
           <a:ln>
             <a:noFill/>
           </a:ln>
@@ -9446,9 +9746,7 @@
           <a:prstGeom prst="rect">
             <a:avLst/>
           </a:prstGeom>
-          <a:solidFill>
-            <a:srgbClr val="FFD700"/>
-          </a:solidFill>
+          <a:solidFill>val="F0B429"/&gt;</a:solidFill>
           <a:ln>
             <a:noFill/>
           </a:ln>
@@ -9490,9 +9788,7 @@
           <a:prstGeom prst="rect">
             <a:avLst/>
           </a:prstGeom>
-          <a:solidFill>
-            <a:srgbClr val="FFD700"/>
-          </a:solidFill>
+          <a:solidFill>val="F0B429"/&gt;</a:solidFill>
           <a:ln>
             <a:noFill/>
           </a:ln>
@@ -9534,9 +9830,7 @@
           <a:prstGeom prst="rect">
             <a:avLst/>
           </a:prstGeom>
-          <a:solidFill>
-            <a:srgbClr val="146B4A"/>
-          </a:solidFill>
+          <a:solidFill>val="007A55"/&gt;</a:solidFill>
           <a:ln>
             <a:noFill/>
           </a:ln>
@@ -9578,9 +9872,7 @@
           <a:prstGeom prst="rect">
             <a:avLst/>
           </a:prstGeom>
-          <a:solidFill>
-            <a:srgbClr val="146B4A"/>
-          </a:solidFill>
+          <a:solidFill>val="007A55"/&gt;</a:solidFill>
           <a:ln>
             <a:noFill/>
           </a:ln>
@@ -9633,10 +9925,8 @@
             <a:pPr algn="ctr"/>
             <a:r>
               <a:rPr sz="2200" b="1" i="0">
-                <a:solidFill>
-                  <a:srgbClr val="BBBBBB"/>
-                </a:solidFill>
-                <a:latin typeface="Calibri"/>
+                <a:solidFill>val="9AA7B6"/&gt;</a:solidFill>
+                <a:latin typeface="Poppins"/>
               </a:rPr>
               <a:t>Section 2</a:t>
             </a:r>
@@ -9668,10 +9958,8 @@
             <a:pPr algn="ctr"/>
             <a:r>
               <a:rPr sz="2800" b="1" i="0">
-                <a:solidFill>
-                  <a:srgbClr val="FFD700"/>
-                </a:solidFill>
-                <a:latin typeface="Calibri"/>
+                <a:solidFill>val="F0B429"/&gt;</a:solidFill>
+                <a:latin typeface="Poppins"/>
               </a:rPr>
               <a:t>History and Evolution</a:t>
             </a:r>
@@ -9702,6 +9990,47 @@
           </a:prstGeom>
         </p:spPr>
       </p:pic>
+      <p:sp>
+        <p:nvSpPr>
+          <p:cNvPr id="990001" name="Pied de page FLE"/>
+          <p:cNvSpPr>
+            <a:spLocks noGrp="1"/>
+          </p:cNvSpPr>
+          <p:nvPr/>
+        </p:nvSpPr>
+        <p:spPr>
+          <a:xfrm>
+            <a:off x="4343400" y="-329184"/>
+            <a:ext cx="4572000" cy="274320"/>
+          </a:xfrm>
+          <a:prstGeom prst="rect">
+            <a:avLst/>
+          </a:prstGeom>
+        </p:spPr>
+        <p:txBody>
+          <a:bodyPr anchor="b"/>
+          <a:lstStyle/>
+          <a:p>
+            <a:pPr algn="r">
+              <a:defRPr sz="900">
+                <a:solidFill>
+                  <a:srgbClr val="9AA7B6"/>
+                </a:solidFill>
+                <a:latin typeface="Poppins"/>
+              </a:defRPr>
+            </a:pPr>
+            <a:r>
+              <a:rPr lang="fr-FR" sz="900">
+                <a:solidFill>
+                  <a:srgbClr val="9AA7B6"/>
+                </a:solidFill>
+                <a:latin typeface="Poppins"/>
+              </a:rPr>
+              <a:t>Université de Mostaganem — Dr. Madani BELACEL</a:t>
+            </a:r>
+          </a:p>
+        </p:txBody>
+      </p:sp>
     </p:spTree>
   </p:cSld>
   <p:clrMapOvr>
@@ -9715,9 +10044,7 @@
   <p:cSld>
     <p:bg>
       <p:bgPr>
-        <a:solidFill>
-          <a:srgbClr val="0B3D2E"/>
-        </a:solidFill>
+        <a:solidFill>val="004A38"/&gt;</a:solidFill>
         <a:effectLst/>
       </p:bgPr>
     </p:bg>
@@ -9742,9 +10069,7 @@
           <a:prstGeom prst="rect">
             <a:avLst/>
           </a:prstGeom>
-          <a:solidFill>
-            <a:srgbClr val="146B4A"/>
-          </a:solidFill>
+          <a:solidFill>val="007A55"/&gt;</a:solidFill>
           <a:ln>
             <a:noFill/>
           </a:ln>
@@ -9786,9 +10111,7 @@
           <a:prstGeom prst="rect">
             <a:avLst/>
           </a:prstGeom>
-          <a:solidFill>
-            <a:srgbClr val="FFD700"/>
-          </a:solidFill>
+          <a:solidFill>val="F0B429"/&gt;</a:solidFill>
           <a:ln>
             <a:noFill/>
           </a:ln>
@@ -9830,9 +10153,7 @@
           <a:prstGeom prst="rect">
             <a:avLst/>
           </a:prstGeom>
-          <a:solidFill>
-            <a:srgbClr val="FFD700"/>
-          </a:solidFill>
+          <a:solidFill>val="F0B429"/&gt;</a:solidFill>
           <a:ln>
             <a:noFill/>
           </a:ln>
@@ -9874,9 +10195,7 @@
           <a:prstGeom prst="rect">
             <a:avLst/>
           </a:prstGeom>
-          <a:solidFill>
-            <a:srgbClr val="146B4A"/>
-          </a:solidFill>
+          <a:solidFill>val="007A55"/&gt;</a:solidFill>
           <a:ln>
             <a:noFill/>
           </a:ln>
@@ -9929,10 +10248,8 @@
             <a:pPr algn="l"/>
             <a:r>
               <a:rPr sz="2400" b="1" i="0">
-                <a:solidFill>
-                  <a:srgbClr val="FFD700"/>
-                </a:solidFill>
-                <a:latin typeface="Calibri"/>
+                <a:solidFill>val="F0B429"/&gt;</a:solidFill>
+                <a:latin typeface="Poppins"/>
               </a:rPr>
               <a:t>2 - History and Evolution</a:t>
             </a:r>
@@ -9953,9 +10270,7 @@
           <a:prstGeom prst="rect">
             <a:avLst/>
           </a:prstGeom>
-          <a:solidFill>
-            <a:srgbClr val="146B4A"/>
-          </a:solidFill>
+          <a:solidFill>val="007A55"/&gt;</a:solidFill>
           <a:ln>
             <a:noFill/>
           </a:ln>
@@ -10012,10 +10327,8 @@
             </a:pPr>
             <a:r>
               <a:rPr sz="1800">
-                <a:solidFill>
-                  <a:srgbClr val="FFFFFF"/>
-                </a:solidFill>
-                <a:latin typeface="Calibri"/>
+                <a:solidFill>val="FFFFFF"/&gt;</a:solidFill>
+                <a:latin typeface="Poppins"/>
               </a:rPr>
               <a:t>▪  Writing and printing: the first information revolutions.</a:t>
             </a:r>
@@ -10028,10 +10341,8 @@
             </a:pPr>
             <a:r>
               <a:rPr sz="1800">
-                <a:solidFill>
-                  <a:srgbClr val="FFFFFF"/>
-                </a:solidFill>
-                <a:latin typeface="Calibri"/>
+                <a:solidFill>val="FFFFFF"/&gt;</a:solidFill>
+                <a:latin typeface="Poppins"/>
               </a:rPr>
               <a:t>▪  Telegraph (1837), telephone (1876), radio and television.</a:t>
             </a:r>
@@ -10044,10 +10355,8 @@
             </a:pPr>
             <a:r>
               <a:rPr sz="1800">
-                <a:solidFill>
-                  <a:srgbClr val="FFFFFF"/>
-                </a:solidFill>
-                <a:latin typeface="Calibri"/>
+                <a:solidFill>val="FFFFFF"/&gt;</a:solidFill>
+                <a:latin typeface="Poppins"/>
               </a:rPr>
               <a:t>▪  First electronic computer ENIAC (1946).</a:t>
             </a:r>
@@ -10060,10 +10369,8 @@
             </a:pPr>
             <a:r>
               <a:rPr sz="1800">
-                <a:solidFill>
-                  <a:srgbClr val="FFFFFF"/>
-                </a:solidFill>
-                <a:latin typeface="Calibri"/>
+                <a:solidFill>val="FFFFFF"/&gt;</a:solidFill>
+                <a:latin typeface="Poppins"/>
               </a:rPr>
               <a:t>▪  Invention of the transistor (1947) then microprocessors (1971).</a:t>
             </a:r>
@@ -10076,10 +10383,8 @@
             </a:pPr>
             <a:r>
               <a:rPr sz="1800">
-                <a:solidFill>
-                  <a:srgbClr val="FFFFFF"/>
-                </a:solidFill>
-                <a:latin typeface="Calibri"/>
+                <a:solidFill>val="FFFFFF"/&gt;</a:solidFill>
+                <a:latin typeface="Poppins"/>
               </a:rPr>
               <a:t>▪  Birth of the Internet (ARPANET, 1969) and the Web (1990).</a:t>
             </a:r>
@@ -10110,6 +10415,47 @@
           </a:prstGeom>
         </p:spPr>
       </p:pic>
+      <p:sp>
+        <p:nvSpPr>
+          <p:cNvPr id="990001" name="Pied de page FLE"/>
+          <p:cNvSpPr>
+            <a:spLocks noGrp="1"/>
+          </p:cNvSpPr>
+          <p:nvPr/>
+        </p:nvSpPr>
+        <p:spPr>
+          <a:xfrm>
+            <a:off x="4343400" y="-329184"/>
+            <a:ext cx="4572000" cy="274320"/>
+          </a:xfrm>
+          <a:prstGeom prst="rect">
+            <a:avLst/>
+          </a:prstGeom>
+        </p:spPr>
+        <p:txBody>
+          <a:bodyPr anchor="b"/>
+          <a:lstStyle/>
+          <a:p>
+            <a:pPr algn="r">
+              <a:defRPr sz="900">
+                <a:solidFill>
+                  <a:srgbClr val="9AA7B6"/>
+                </a:solidFill>
+                <a:latin typeface="Poppins"/>
+              </a:defRPr>
+            </a:pPr>
+            <a:r>
+              <a:rPr lang="fr-FR" sz="900">
+                <a:solidFill>
+                  <a:srgbClr val="9AA7B6"/>
+                </a:solidFill>
+                <a:latin typeface="Poppins"/>
+              </a:rPr>
+              <a:t>Université de Mostaganem — Dr. Madani BELACEL</a:t>
+            </a:r>
+          </a:p>
+        </p:txBody>
+      </p:sp>
     </p:spTree>
   </p:cSld>
   <p:clrMapOvr>
@@ -10123,9 +10469,7 @@
   <p:cSld>
     <p:bg>
       <p:bgPr>
-        <a:solidFill>
-          <a:srgbClr val="0B3D2E"/>
-        </a:solidFill>
+        <a:solidFill>val="004A38"/&gt;</a:solidFill>
         <a:effectLst/>
       </p:bgPr>
     </p:bg>
@@ -10150,9 +10494,7 @@
           <a:prstGeom prst="rect">
             <a:avLst/>
           </a:prstGeom>
-          <a:solidFill>
-            <a:srgbClr val="146B4A"/>
-          </a:solidFill>
+          <a:solidFill>val="007A55"/&gt;</a:solidFill>
           <a:ln>
             <a:noFill/>
           </a:ln>
@@ -10194,9 +10536,7 @@
           <a:prstGeom prst="rect">
             <a:avLst/>
           </a:prstGeom>
-          <a:solidFill>
-            <a:srgbClr val="FFD700"/>
-          </a:solidFill>
+          <a:solidFill>val="F0B429"/&gt;</a:solidFill>
           <a:ln>
             <a:noFill/>
           </a:ln>
@@ -10238,9 +10578,7 @@
           <a:prstGeom prst="rect">
             <a:avLst/>
           </a:prstGeom>
-          <a:solidFill>
-            <a:srgbClr val="FFD700"/>
-          </a:solidFill>
+          <a:solidFill>val="F0B429"/&gt;</a:solidFill>
           <a:ln>
             <a:noFill/>
           </a:ln>
@@ -10282,9 +10620,7 @@
           <a:prstGeom prst="rect">
             <a:avLst/>
           </a:prstGeom>
-          <a:solidFill>
-            <a:srgbClr val="146B4A"/>
-          </a:solidFill>
+          <a:solidFill>val="007A55"/&gt;</a:solidFill>
           <a:ln>
             <a:noFill/>
           </a:ln>
@@ -10326,9 +10662,7 @@
           <a:prstGeom prst="rect">
             <a:avLst/>
           </a:prstGeom>
-          <a:solidFill>
-            <a:srgbClr val="146B4A"/>
-          </a:solidFill>
+          <a:solidFill>val="007A55"/&gt;</a:solidFill>
           <a:ln>
             <a:noFill/>
           </a:ln>
@@ -10381,10 +10715,8 @@
             <a:pPr algn="ctr"/>
             <a:r>
               <a:rPr sz="2200" b="1" i="0">
-                <a:solidFill>
-                  <a:srgbClr val="BBBBBB"/>
-                </a:solidFill>
-                <a:latin typeface="Calibri"/>
+                <a:solidFill>val="9AA7B6"/&gt;</a:solidFill>
+                <a:latin typeface="Poppins"/>
               </a:rPr>
               <a:t>Section 3</a:t>
             </a:r>
@@ -10416,10 +10748,8 @@
             <a:pPr algn="ctr"/>
             <a:r>
               <a:rPr sz="2800" b="1" i="0">
-                <a:solidFill>
-                  <a:srgbClr val="FFD700"/>
-                </a:solidFill>
-                <a:latin typeface="Calibri"/>
+                <a:solidFill>val="F0B429"/&gt;</a:solidFill>
+                <a:latin typeface="Poppins"/>
               </a:rPr>
               <a:t>Components of ICT</a:t>
             </a:r>
@@ -10450,6 +10780,47 @@
           </a:prstGeom>
         </p:spPr>
       </p:pic>
+      <p:sp>
+        <p:nvSpPr>
+          <p:cNvPr id="990001" name="Pied de page FLE"/>
+          <p:cNvSpPr>
+            <a:spLocks noGrp="1"/>
+          </p:cNvSpPr>
+          <p:nvPr/>
+        </p:nvSpPr>
+        <p:spPr>
+          <a:xfrm>
+            <a:off x="4343400" y="-329184"/>
+            <a:ext cx="4572000" cy="274320"/>
+          </a:xfrm>
+          <a:prstGeom prst="rect">
+            <a:avLst/>
+          </a:prstGeom>
+        </p:spPr>
+        <p:txBody>
+          <a:bodyPr anchor="b"/>
+          <a:lstStyle/>
+          <a:p>
+            <a:pPr algn="r">
+              <a:defRPr sz="900">
+                <a:solidFill>
+                  <a:srgbClr val="9AA7B6"/>
+                </a:solidFill>
+                <a:latin typeface="Poppins"/>
+              </a:defRPr>
+            </a:pPr>
+            <a:r>
+              <a:rPr lang="fr-FR" sz="900">
+                <a:solidFill>
+                  <a:srgbClr val="9AA7B6"/>
+                </a:solidFill>
+                <a:latin typeface="Poppins"/>
+              </a:rPr>
+              <a:t>Université de Mostaganem — Dr. Madani BELACEL</a:t>
+            </a:r>
+          </a:p>
+        </p:txBody>
+      </p:sp>
     </p:spTree>
   </p:cSld>
   <p:clrMapOvr>
@@ -10463,9 +10834,7 @@
   <p:cSld>
     <p:bg>
       <p:bgPr>
-        <a:solidFill>
-          <a:srgbClr val="0B3D2E"/>
-        </a:solidFill>
+        <a:solidFill>val="004A38"/&gt;</a:solidFill>
         <a:effectLst/>
       </p:bgPr>
     </p:bg>
@@ -10490,9 +10859,7 @@
           <a:prstGeom prst="rect">
             <a:avLst/>
           </a:prstGeom>
-          <a:solidFill>
-            <a:srgbClr val="146B4A"/>
-          </a:solidFill>
+          <a:solidFill>val="007A55"/&gt;</a:solidFill>
           <a:ln>
             <a:noFill/>
           </a:ln>
@@ -10534,9 +10901,7 @@
           <a:prstGeom prst="rect">
             <a:avLst/>
           </a:prstGeom>
-          <a:solidFill>
-            <a:srgbClr val="FFD700"/>
-          </a:solidFill>
+          <a:solidFill>val="F0B429"/&gt;</a:solidFill>
           <a:ln>
             <a:noFill/>
           </a:ln>
@@ -10578,9 +10943,7 @@
           <a:prstGeom prst="rect">
             <a:avLst/>
           </a:prstGeom>
-          <a:solidFill>
-            <a:srgbClr val="FFD700"/>
-          </a:solidFill>
+          <a:solidFill>val="F0B429"/&gt;</a:solidFill>
           <a:ln>
             <a:noFill/>
           </a:ln>
@@ -10622,9 +10985,7 @@
           <a:prstGeom prst="rect">
             <a:avLst/>
           </a:prstGeom>
-          <a:solidFill>
-            <a:srgbClr val="146B4A"/>
-          </a:solidFill>
+          <a:solidFill>val="007A55"/&gt;</a:solidFill>
           <a:ln>
             <a:noFill/>
           </a:ln>
@@ -10677,10 +11038,8 @@
             <a:pPr algn="l"/>
             <a:r>
               <a:rPr sz="2400" b="1" i="0">
-                <a:solidFill>
-                  <a:srgbClr val="FFD700"/>
-                </a:solidFill>
-                <a:latin typeface="Calibri"/>
+                <a:solidFill>val="F0B429"/&gt;</a:solidFill>
+                <a:latin typeface="Poppins"/>
               </a:rPr>
               <a:t>3 - Components of ICT</a:t>
             </a:r>
@@ -10701,9 +11060,7 @@
           <a:prstGeom prst="rect">
             <a:avLst/>
           </a:prstGeom>
-          <a:solidFill>
-            <a:srgbClr val="146B4A"/>
-          </a:solidFill>
+          <a:solidFill>val="007A55"/&gt;</a:solidFill>
           <a:ln>
             <a:noFill/>
           </a:ln>
@@ -10760,10 +11117,8 @@
             </a:pPr>
             <a:r>
               <a:rPr sz="1800">
-                <a:solidFill>
-                  <a:srgbClr val="FFFFFF"/>
-                </a:solidFill>
-                <a:latin typeface="Calibri"/>
+                <a:solidFill>val="FFFFFF"/&gt;</a:solidFill>
+                <a:latin typeface="Poppins"/>
               </a:rPr>
               <a:t>▪  Hardware: machines and peripherals.</a:t>
             </a:r>
@@ -10776,10 +11131,8 @@
             </a:pPr>
             <a:r>
               <a:rPr sz="1800">
-                <a:solidFill>
-                  <a:srgbClr val="FFFFFF"/>
-                </a:solidFill>
-                <a:latin typeface="Calibri"/>
+                <a:solidFill>val="FFFFFF"/&gt;</a:solidFill>
+                <a:latin typeface="Poppins"/>
               </a:rPr>
               <a:t>▪  Software: programs and operating systems.</a:t>
             </a:r>
@@ -10792,10 +11145,8 @@
             </a:pPr>
             <a:r>
               <a:rPr sz="1800">
-                <a:solidFill>
-                  <a:srgbClr val="FFFFFF"/>
-                </a:solidFill>
-                <a:latin typeface="Calibri"/>
+                <a:solidFill>val="FFFFFF"/&gt;</a:solidFill>
+                <a:latin typeface="Poppins"/>
               </a:rPr>
               <a:t>▪  Networks: wired and wireless communication infrastructure.</a:t>
             </a:r>
@@ -10808,10 +11159,8 @@
             </a:pPr>
             <a:r>
               <a:rPr sz="1800">
-                <a:solidFill>
-                  <a:srgbClr val="FFFFFF"/>
-                </a:solidFill>
-                <a:latin typeface="Calibri"/>
+                <a:solidFill>val="FFFFFF"/&gt;</a:solidFill>
+                <a:latin typeface="Poppins"/>
               </a:rPr>
               <a:t>▪  Data: digitized and structured information.</a:t>
             </a:r>
@@ -10824,10 +11173,8 @@
             </a:pPr>
             <a:r>
               <a:rPr sz="1800">
-                <a:solidFill>
-                  <a:srgbClr val="FFFFFF"/>
-                </a:solidFill>
-                <a:latin typeface="Calibri"/>
+                <a:solidFill>val="FFFFFF"/&gt;</a:solidFill>
+                <a:latin typeface="Poppins"/>
               </a:rPr>
               <a:t>▪  Human resources: users and specialists.</a:t>
             </a:r>
@@ -10858,6 +11205,47 @@
           </a:prstGeom>
         </p:spPr>
       </p:pic>
+      <p:sp>
+        <p:nvSpPr>
+          <p:cNvPr id="990001" name="Pied de page FLE"/>
+          <p:cNvSpPr>
+            <a:spLocks noGrp="1"/>
+          </p:cNvSpPr>
+          <p:nvPr/>
+        </p:nvSpPr>
+        <p:spPr>
+          <a:xfrm>
+            <a:off x="4343400" y="-329184"/>
+            <a:ext cx="4572000" cy="274320"/>
+          </a:xfrm>
+          <a:prstGeom prst="rect">
+            <a:avLst/>
+          </a:prstGeom>
+        </p:spPr>
+        <p:txBody>
+          <a:bodyPr anchor="b"/>
+          <a:lstStyle/>
+          <a:p>
+            <a:pPr algn="r">
+              <a:defRPr sz="900">
+                <a:solidFill>
+                  <a:srgbClr val="9AA7B6"/>
+                </a:solidFill>
+                <a:latin typeface="Poppins"/>
+              </a:defRPr>
+            </a:pPr>
+            <a:r>
+              <a:rPr lang="fr-FR" sz="900">
+                <a:solidFill>
+                  <a:srgbClr val="9AA7B6"/>
+                </a:solidFill>
+                <a:latin typeface="Poppins"/>
+              </a:rPr>
+              <a:t>Université de Mostaganem — Dr. Madani BELACEL</a:t>
+            </a:r>
+          </a:p>
+        </p:txBody>
+      </p:sp>
     </p:spTree>
   </p:cSld>
   <p:clrMapOvr>
@@ -10871,9 +11259,7 @@
   <p:cSld>
     <p:bg>
       <p:bgPr>
-        <a:solidFill>
-          <a:srgbClr val="0B3D2E"/>
-        </a:solidFill>
+        <a:solidFill>val="004A38"/&gt;</a:solidFill>
         <a:effectLst/>
       </p:bgPr>
     </p:bg>
@@ -10898,9 +11284,7 @@
           <a:prstGeom prst="rect">
             <a:avLst/>
           </a:prstGeom>
-          <a:solidFill>
-            <a:srgbClr val="146B4A"/>
-          </a:solidFill>
+          <a:solidFill>val="007A55"/&gt;</a:solidFill>
           <a:ln>
             <a:noFill/>
           </a:ln>
@@ -10942,9 +11326,7 @@
           <a:prstGeom prst="rect">
             <a:avLst/>
           </a:prstGeom>
-          <a:solidFill>
-            <a:srgbClr val="FFD700"/>
-          </a:solidFill>
+          <a:solidFill>val="F0B429"/&gt;</a:solidFill>
           <a:ln>
             <a:noFill/>
           </a:ln>
@@ -10986,9 +11368,7 @@
           <a:prstGeom prst="rect">
             <a:avLst/>
           </a:prstGeom>
-          <a:solidFill>
-            <a:srgbClr val="FFD700"/>
-          </a:solidFill>
+          <a:solidFill>val="F0B429"/&gt;</a:solidFill>
           <a:ln>
             <a:noFill/>
           </a:ln>
@@ -11030,9 +11410,7 @@
           <a:prstGeom prst="rect">
             <a:avLst/>
           </a:prstGeom>
-          <a:solidFill>
-            <a:srgbClr val="146B4A"/>
-          </a:solidFill>
+          <a:solidFill>val="007A55"/&gt;</a:solidFill>
           <a:ln>
             <a:noFill/>
           </a:ln>
@@ -11074,9 +11452,7 @@
           <a:prstGeom prst="rect">
             <a:avLst/>
           </a:prstGeom>
-          <a:solidFill>
-            <a:srgbClr val="146B4A"/>
-          </a:solidFill>
+          <a:solidFill>val="007A55"/&gt;</a:solidFill>
           <a:ln>
             <a:noFill/>
           </a:ln>
@@ -11129,10 +11505,8 @@
             <a:pPr algn="ctr"/>
             <a:r>
               <a:rPr sz="2200" b="1" i="0">
-                <a:solidFill>
-                  <a:srgbClr val="BBBBBB"/>
-                </a:solidFill>
-                <a:latin typeface="Calibri"/>
+                <a:solidFill>val="9AA7B6"/&gt;</a:solidFill>
+                <a:latin typeface="Poppins"/>
               </a:rPr>
               <a:t>Section 4</a:t>
             </a:r>
@@ -11164,10 +11538,8 @@
             <a:pPr algn="ctr"/>
             <a:r>
               <a:rPr sz="2800" b="1" i="0">
-                <a:solidFill>
-                  <a:srgbClr val="FFD700"/>
-                </a:solidFill>
-                <a:latin typeface="Calibri"/>
+                <a:solidFill>val="F0B429"/&gt;</a:solidFill>
+                <a:latin typeface="Poppins"/>
               </a:rPr>
               <a:t>Impact of ICT on Society</a:t>
             </a:r>
@@ -11198,6 +11570,47 @@
           </a:prstGeom>
         </p:spPr>
       </p:pic>
+      <p:sp>
+        <p:nvSpPr>
+          <p:cNvPr id="990001" name="Pied de page FLE"/>
+          <p:cNvSpPr>
+            <a:spLocks noGrp="1"/>
+          </p:cNvSpPr>
+          <p:nvPr/>
+        </p:nvSpPr>
+        <p:spPr>
+          <a:xfrm>
+            <a:off x="4343400" y="-329184"/>
+            <a:ext cx="4572000" cy="274320"/>
+          </a:xfrm>
+          <a:prstGeom prst="rect">
+            <a:avLst/>
+          </a:prstGeom>
+        </p:spPr>
+        <p:txBody>
+          <a:bodyPr anchor="b"/>
+          <a:lstStyle/>
+          <a:p>
+            <a:pPr algn="r">
+              <a:defRPr sz="900">
+                <a:solidFill>
+                  <a:srgbClr val="9AA7B6"/>
+                </a:solidFill>
+                <a:latin typeface="Poppins"/>
+              </a:defRPr>
+            </a:pPr>
+            <a:r>
+              <a:rPr lang="fr-FR" sz="900">
+                <a:solidFill>
+                  <a:srgbClr val="9AA7B6"/>
+                </a:solidFill>
+                <a:latin typeface="Poppins"/>
+              </a:rPr>
+              <a:t>Université de Mostaganem — Dr. Madani BELACEL</a:t>
+            </a:r>
+          </a:p>
+        </p:txBody>
+      </p:sp>
     </p:spTree>
   </p:cSld>
   <p:clrMapOvr>
@@ -11249,7 +11662,7 @@
     </a:clrScheme>
     <a:fontScheme name="Office">
       <a:majorFont>
-        <a:latin typeface="Calibri"/>
+        <a:latin typeface="Poppins"/>
         <a:ea typeface=""/>
         <a:cs typeface=""/>
         <a:font script="Jpan" typeface="ＭＳ Ｐゴシック"/>
@@ -11284,7 +11697,7 @@
         <a:font script="Geor" typeface="Sylfaen"/>
       </a:majorFont>
       <a:minorFont>
-        <a:latin typeface="Calibri"/>
+        <a:latin typeface="Poppins"/>
         <a:ea typeface=""/>
         <a:cs typeface=""/>
         <a:font script="Jpan" typeface="ＭＳ Ｐゴシック"/>
